--- a/藉我賜恩福_v2.pptx
+++ b/藉我賜恩福_v2.pptx
@@ -5,12 +5,19 @@
     <p:sldMasterId id="2147483660" r:id="rId1"/>
   </p:sldMasterIdLst>
   <p:sldIdLst>
-    <p:sldId id="257" r:id="rId2"/>
-    <p:sldId id="258" r:id="rId3"/>
-    <p:sldId id="259" r:id="rId4"/>
-    <p:sldId id="260" r:id="rId5"/>
-    <p:sldId id="261" r:id="rId6"/>
-    <p:sldId id="262" r:id="rId7"/>
+    <p:sldId id="353" r:id="rId2"/>
+    <p:sldId id="412" r:id="rId3"/>
+    <p:sldId id="739" r:id="rId4"/>
+    <p:sldId id="740" r:id="rId5"/>
+    <p:sldId id="741" r:id="rId6"/>
+    <p:sldId id="742" r:id="rId7"/>
+    <p:sldId id="743" r:id="rId8"/>
+    <p:sldId id="744" r:id="rId9"/>
+    <p:sldId id="745" r:id="rId10"/>
+    <p:sldId id="746" r:id="rId11"/>
+    <p:sldId id="747" r:id="rId12"/>
+    <p:sldId id="748" r:id="rId13"/>
+    <p:sldId id="749" r:id="rId14"/>
   </p:sldIdLst>
   <p:sldSz cx="9144000" cy="5143500" type="screen16x9"/>
   <p:notesSz cx="6858000" cy="9144000"/>
@@ -109,6 +116,22 @@
       </a:defRPr>
     </a:lvl9pPr>
   </p:defaultTextStyle>
+  <p:extLst>
+    <p:ext uri="{EFAFB233-063F-42B5-8137-9DF3F51BA10A}">
+      <p15:sldGuideLst xmlns:p15="http://schemas.microsoft.com/office/powerpoint/2012/main">
+        <p15:guide id="1" orient="horz" pos="1620">
+          <p15:clr>
+            <a:srgbClr val="A4A3A4"/>
+          </p15:clr>
+        </p15:guide>
+        <p15:guide id="2" pos="2880">
+          <p15:clr>
+            <a:srgbClr val="A4A3A4"/>
+          </p15:clr>
+        </p15:guide>
+      </p15:sldGuideLst>
+    </p:ext>
+  </p:extLst>
 </p:presentation>
 </file>
 
@@ -150,7 +173,7 @@
           <a:lstStyle/>
           <a:p>
             <a:r>
-              <a:rPr lang="en-US" altLang="zh-TW" smtClean="0"/>
+              <a:rPr lang="en-US" altLang="zh-TW"/>
               <a:t>Click to edit Master title style</a:t>
             </a:r>
             <a:endParaRPr lang="zh-TW" altLang="en-US"/>
@@ -269,7 +292,7 @@
           </a:lstStyle>
           <a:p>
             <a:r>
-              <a:rPr lang="en-US" altLang="zh-TW" smtClean="0"/>
+              <a:rPr lang="en-US" altLang="zh-TW"/>
               <a:t>Click to edit Master subtitle style</a:t>
             </a:r>
             <a:endParaRPr lang="zh-TW" altLang="en-US"/>
@@ -293,7 +316,7 @@
           <a:p>
             <a:fld id="{AA12F21D-92BA-4313-92D1-A04658EBF3C3}" type="datetimeFigureOut">
               <a:rPr lang="en-US" smtClean="0"/>
-              <a:t>9/26/2019</a:t>
+              <a:t>6/27/2025</a:t>
             </a:fld>
             <a:endParaRPr lang="en-US"/>
           </a:p>
@@ -382,7 +405,7 @@
           <a:lstStyle/>
           <a:p>
             <a:r>
-              <a:rPr lang="en-US" altLang="zh-TW" smtClean="0"/>
+              <a:rPr lang="en-US" altLang="zh-TW"/>
               <a:t>Click to edit Master title style</a:t>
             </a:r>
             <a:endParaRPr lang="zh-TW" altLang="en-US"/>
@@ -406,35 +429,35 @@
           <a:p>
             <a:pPr lvl="0"/>
             <a:r>
-              <a:rPr lang="en-US" altLang="zh-TW" smtClean="0"/>
+              <a:rPr lang="en-US" altLang="zh-TW"/>
               <a:t>Click to edit Master text styles</a:t>
             </a:r>
           </a:p>
           <a:p>
             <a:pPr lvl="1"/>
             <a:r>
-              <a:rPr lang="en-US" altLang="zh-TW" smtClean="0"/>
+              <a:rPr lang="en-US" altLang="zh-TW"/>
               <a:t>Second level</a:t>
             </a:r>
           </a:p>
           <a:p>
             <a:pPr lvl="2"/>
             <a:r>
-              <a:rPr lang="en-US" altLang="zh-TW" smtClean="0"/>
+              <a:rPr lang="en-US" altLang="zh-TW"/>
               <a:t>Third level</a:t>
             </a:r>
           </a:p>
           <a:p>
             <a:pPr lvl="3"/>
             <a:r>
-              <a:rPr lang="en-US" altLang="zh-TW" smtClean="0"/>
+              <a:rPr lang="en-US" altLang="zh-TW"/>
               <a:t>Fourth level</a:t>
             </a:r>
           </a:p>
           <a:p>
             <a:pPr lvl="4"/>
             <a:r>
-              <a:rPr lang="en-US" altLang="zh-TW" smtClean="0"/>
+              <a:rPr lang="en-US" altLang="zh-TW"/>
               <a:t>Fifth level</a:t>
             </a:r>
             <a:endParaRPr lang="zh-TW" altLang="en-US"/>
@@ -458,7 +481,7 @@
           <a:p>
             <a:fld id="{AA12F21D-92BA-4313-92D1-A04658EBF3C3}" type="datetimeFigureOut">
               <a:rPr lang="en-US" smtClean="0"/>
-              <a:t>9/26/2019</a:t>
+              <a:t>6/27/2025</a:t>
             </a:fld>
             <a:endParaRPr lang="en-US"/>
           </a:p>
@@ -552,7 +575,7 @@
           <a:lstStyle/>
           <a:p>
             <a:r>
-              <a:rPr lang="en-US" altLang="zh-TW" smtClean="0"/>
+              <a:rPr lang="en-US" altLang="zh-TW"/>
               <a:t>Click to edit Master title style</a:t>
             </a:r>
             <a:endParaRPr lang="zh-TW" altLang="en-US"/>
@@ -581,35 +604,35 @@
           <a:p>
             <a:pPr lvl="0"/>
             <a:r>
-              <a:rPr lang="en-US" altLang="zh-TW" smtClean="0"/>
+              <a:rPr lang="en-US" altLang="zh-TW"/>
               <a:t>Click to edit Master text styles</a:t>
             </a:r>
           </a:p>
           <a:p>
             <a:pPr lvl="1"/>
             <a:r>
-              <a:rPr lang="en-US" altLang="zh-TW" smtClean="0"/>
+              <a:rPr lang="en-US" altLang="zh-TW"/>
               <a:t>Second level</a:t>
             </a:r>
           </a:p>
           <a:p>
             <a:pPr lvl="2"/>
             <a:r>
-              <a:rPr lang="en-US" altLang="zh-TW" smtClean="0"/>
+              <a:rPr lang="en-US" altLang="zh-TW"/>
               <a:t>Third level</a:t>
             </a:r>
           </a:p>
           <a:p>
             <a:pPr lvl="3"/>
             <a:r>
-              <a:rPr lang="en-US" altLang="zh-TW" smtClean="0"/>
+              <a:rPr lang="en-US" altLang="zh-TW"/>
               <a:t>Fourth level</a:t>
             </a:r>
           </a:p>
           <a:p>
             <a:pPr lvl="4"/>
             <a:r>
-              <a:rPr lang="en-US" altLang="zh-TW" smtClean="0"/>
+              <a:rPr lang="en-US" altLang="zh-TW"/>
               <a:t>Fifth level</a:t>
             </a:r>
             <a:endParaRPr lang="zh-TW" altLang="en-US"/>
@@ -633,7 +656,7 @@
           <a:p>
             <a:fld id="{AA12F21D-92BA-4313-92D1-A04658EBF3C3}" type="datetimeFigureOut">
               <a:rPr lang="en-US" smtClean="0"/>
-              <a:t>9/26/2019</a:t>
+              <a:t>6/27/2025</a:t>
             </a:fld>
             <a:endParaRPr lang="en-US"/>
           </a:p>
@@ -722,7 +745,7 @@
           <a:lstStyle/>
           <a:p>
             <a:r>
-              <a:rPr lang="en-US" altLang="zh-TW" smtClean="0"/>
+              <a:rPr lang="en-US" altLang="zh-TW"/>
               <a:t>Click to edit Master title style</a:t>
             </a:r>
             <a:endParaRPr lang="zh-TW" altLang="en-US"/>
@@ -746,35 +769,35 @@
           <a:p>
             <a:pPr lvl="0"/>
             <a:r>
-              <a:rPr lang="en-US" altLang="zh-TW" smtClean="0"/>
+              <a:rPr lang="en-US" altLang="zh-TW"/>
               <a:t>Click to edit Master text styles</a:t>
             </a:r>
           </a:p>
           <a:p>
             <a:pPr lvl="1"/>
             <a:r>
-              <a:rPr lang="en-US" altLang="zh-TW" smtClean="0"/>
+              <a:rPr lang="en-US" altLang="zh-TW"/>
               <a:t>Second level</a:t>
             </a:r>
           </a:p>
           <a:p>
             <a:pPr lvl="2"/>
             <a:r>
-              <a:rPr lang="en-US" altLang="zh-TW" smtClean="0"/>
+              <a:rPr lang="en-US" altLang="zh-TW"/>
               <a:t>Third level</a:t>
             </a:r>
           </a:p>
           <a:p>
             <a:pPr lvl="3"/>
             <a:r>
-              <a:rPr lang="en-US" altLang="zh-TW" smtClean="0"/>
+              <a:rPr lang="en-US" altLang="zh-TW"/>
               <a:t>Fourth level</a:t>
             </a:r>
           </a:p>
           <a:p>
             <a:pPr lvl="4"/>
             <a:r>
-              <a:rPr lang="en-US" altLang="zh-TW" smtClean="0"/>
+              <a:rPr lang="en-US" altLang="zh-TW"/>
               <a:t>Fifth level</a:t>
             </a:r>
             <a:endParaRPr lang="zh-TW" altLang="en-US"/>
@@ -798,7 +821,7 @@
           <a:p>
             <a:fld id="{AA12F21D-92BA-4313-92D1-A04658EBF3C3}" type="datetimeFigureOut">
               <a:rPr lang="en-US" smtClean="0"/>
-              <a:t>9/26/2019</a:t>
+              <a:t>6/27/2025</a:t>
             </a:fld>
             <a:endParaRPr lang="en-US"/>
           </a:p>
@@ -896,7 +919,7 @@
           </a:lstStyle>
           <a:p>
             <a:r>
-              <a:rPr lang="en-US" altLang="zh-TW" smtClean="0"/>
+              <a:rPr lang="en-US" altLang="zh-TW"/>
               <a:t>Click to edit Master title style</a:t>
             </a:r>
             <a:endParaRPr lang="zh-TW" altLang="en-US"/>
@@ -1016,7 +1039,7 @@
           <a:p>
             <a:pPr lvl="0"/>
             <a:r>
-              <a:rPr lang="en-US" altLang="zh-TW" smtClean="0"/>
+              <a:rPr lang="en-US" altLang="zh-TW"/>
               <a:t>Click to edit Master text styles</a:t>
             </a:r>
           </a:p>
@@ -1039,7 +1062,7 @@
           <a:p>
             <a:fld id="{AA12F21D-92BA-4313-92D1-A04658EBF3C3}" type="datetimeFigureOut">
               <a:rPr lang="en-US" smtClean="0"/>
-              <a:t>9/26/2019</a:t>
+              <a:t>6/27/2025</a:t>
             </a:fld>
             <a:endParaRPr lang="en-US"/>
           </a:p>
@@ -1128,7 +1151,7 @@
           <a:lstStyle/>
           <a:p>
             <a:r>
-              <a:rPr lang="en-US" altLang="zh-TW" smtClean="0"/>
+              <a:rPr lang="en-US" altLang="zh-TW"/>
               <a:t>Click to edit Master title style</a:t>
             </a:r>
             <a:endParaRPr lang="zh-TW" altLang="en-US"/>
@@ -1185,35 +1208,35 @@
           <a:p>
             <a:pPr lvl="0"/>
             <a:r>
-              <a:rPr lang="en-US" altLang="zh-TW" smtClean="0"/>
+              <a:rPr lang="en-US" altLang="zh-TW"/>
               <a:t>Click to edit Master text styles</a:t>
             </a:r>
           </a:p>
           <a:p>
             <a:pPr lvl="1"/>
             <a:r>
-              <a:rPr lang="en-US" altLang="zh-TW" smtClean="0"/>
+              <a:rPr lang="en-US" altLang="zh-TW"/>
               <a:t>Second level</a:t>
             </a:r>
           </a:p>
           <a:p>
             <a:pPr lvl="2"/>
             <a:r>
-              <a:rPr lang="en-US" altLang="zh-TW" smtClean="0"/>
+              <a:rPr lang="en-US" altLang="zh-TW"/>
               <a:t>Third level</a:t>
             </a:r>
           </a:p>
           <a:p>
             <a:pPr lvl="3"/>
             <a:r>
-              <a:rPr lang="en-US" altLang="zh-TW" smtClean="0"/>
+              <a:rPr lang="en-US" altLang="zh-TW"/>
               <a:t>Fourth level</a:t>
             </a:r>
           </a:p>
           <a:p>
             <a:pPr lvl="4"/>
             <a:r>
-              <a:rPr lang="en-US" altLang="zh-TW" smtClean="0"/>
+              <a:rPr lang="en-US" altLang="zh-TW"/>
               <a:t>Fifth level</a:t>
             </a:r>
             <a:endParaRPr lang="zh-TW" altLang="en-US"/>
@@ -1270,35 +1293,35 @@
           <a:p>
             <a:pPr lvl="0"/>
             <a:r>
-              <a:rPr lang="en-US" altLang="zh-TW" smtClean="0"/>
+              <a:rPr lang="en-US" altLang="zh-TW"/>
               <a:t>Click to edit Master text styles</a:t>
             </a:r>
           </a:p>
           <a:p>
             <a:pPr lvl="1"/>
             <a:r>
-              <a:rPr lang="en-US" altLang="zh-TW" smtClean="0"/>
+              <a:rPr lang="en-US" altLang="zh-TW"/>
               <a:t>Second level</a:t>
             </a:r>
           </a:p>
           <a:p>
             <a:pPr lvl="2"/>
             <a:r>
-              <a:rPr lang="en-US" altLang="zh-TW" smtClean="0"/>
+              <a:rPr lang="en-US" altLang="zh-TW"/>
               <a:t>Third level</a:t>
             </a:r>
           </a:p>
           <a:p>
             <a:pPr lvl="3"/>
             <a:r>
-              <a:rPr lang="en-US" altLang="zh-TW" smtClean="0"/>
+              <a:rPr lang="en-US" altLang="zh-TW"/>
               <a:t>Fourth level</a:t>
             </a:r>
           </a:p>
           <a:p>
             <a:pPr lvl="4"/>
             <a:r>
-              <a:rPr lang="en-US" altLang="zh-TW" smtClean="0"/>
+              <a:rPr lang="en-US" altLang="zh-TW"/>
               <a:t>Fifth level</a:t>
             </a:r>
             <a:endParaRPr lang="zh-TW" altLang="en-US"/>
@@ -1322,7 +1345,7 @@
           <a:p>
             <a:fld id="{AA12F21D-92BA-4313-92D1-A04658EBF3C3}" type="datetimeFigureOut">
               <a:rPr lang="en-US" smtClean="0"/>
-              <a:t>9/26/2019</a:t>
+              <a:t>6/27/2025</a:t>
             </a:fld>
             <a:endParaRPr lang="en-US"/>
           </a:p>
@@ -1415,7 +1438,7 @@
           </a:lstStyle>
           <a:p>
             <a:r>
-              <a:rPr lang="en-US" altLang="zh-TW" smtClean="0"/>
+              <a:rPr lang="en-US" altLang="zh-TW"/>
               <a:t>Click to edit Master title style</a:t>
             </a:r>
             <a:endParaRPr lang="zh-TW" altLang="en-US"/>
@@ -1481,7 +1504,7 @@
           <a:p>
             <a:pPr lvl="0"/>
             <a:r>
-              <a:rPr lang="en-US" altLang="zh-TW" smtClean="0"/>
+              <a:rPr lang="en-US" altLang="zh-TW"/>
               <a:t>Click to edit Master text styles</a:t>
             </a:r>
           </a:p>
@@ -1537,35 +1560,35 @@
           <a:p>
             <a:pPr lvl="0"/>
             <a:r>
-              <a:rPr lang="en-US" altLang="zh-TW" smtClean="0"/>
+              <a:rPr lang="en-US" altLang="zh-TW"/>
               <a:t>Click to edit Master text styles</a:t>
             </a:r>
           </a:p>
           <a:p>
             <a:pPr lvl="1"/>
             <a:r>
-              <a:rPr lang="en-US" altLang="zh-TW" smtClean="0"/>
+              <a:rPr lang="en-US" altLang="zh-TW"/>
               <a:t>Second level</a:t>
             </a:r>
           </a:p>
           <a:p>
             <a:pPr lvl="2"/>
             <a:r>
-              <a:rPr lang="en-US" altLang="zh-TW" smtClean="0"/>
+              <a:rPr lang="en-US" altLang="zh-TW"/>
               <a:t>Third level</a:t>
             </a:r>
           </a:p>
           <a:p>
             <a:pPr lvl="3"/>
             <a:r>
-              <a:rPr lang="en-US" altLang="zh-TW" smtClean="0"/>
+              <a:rPr lang="en-US" altLang="zh-TW"/>
               <a:t>Fourth level</a:t>
             </a:r>
           </a:p>
           <a:p>
             <a:pPr lvl="4"/>
             <a:r>
-              <a:rPr lang="en-US" altLang="zh-TW" smtClean="0"/>
+              <a:rPr lang="en-US" altLang="zh-TW"/>
               <a:t>Fifth level</a:t>
             </a:r>
             <a:endParaRPr lang="zh-TW" altLang="en-US"/>
@@ -1631,7 +1654,7 @@
           <a:p>
             <a:pPr lvl="0"/>
             <a:r>
-              <a:rPr lang="en-US" altLang="zh-TW" smtClean="0"/>
+              <a:rPr lang="en-US" altLang="zh-TW"/>
               <a:t>Click to edit Master text styles</a:t>
             </a:r>
           </a:p>
@@ -1687,35 +1710,35 @@
           <a:p>
             <a:pPr lvl="0"/>
             <a:r>
-              <a:rPr lang="en-US" altLang="zh-TW" smtClean="0"/>
+              <a:rPr lang="en-US" altLang="zh-TW"/>
               <a:t>Click to edit Master text styles</a:t>
             </a:r>
           </a:p>
           <a:p>
             <a:pPr lvl="1"/>
             <a:r>
-              <a:rPr lang="en-US" altLang="zh-TW" smtClean="0"/>
+              <a:rPr lang="en-US" altLang="zh-TW"/>
               <a:t>Second level</a:t>
             </a:r>
           </a:p>
           <a:p>
             <a:pPr lvl="2"/>
             <a:r>
-              <a:rPr lang="en-US" altLang="zh-TW" smtClean="0"/>
+              <a:rPr lang="en-US" altLang="zh-TW"/>
               <a:t>Third level</a:t>
             </a:r>
           </a:p>
           <a:p>
             <a:pPr lvl="3"/>
             <a:r>
-              <a:rPr lang="en-US" altLang="zh-TW" smtClean="0"/>
+              <a:rPr lang="en-US" altLang="zh-TW"/>
               <a:t>Fourth level</a:t>
             </a:r>
           </a:p>
           <a:p>
             <a:pPr lvl="4"/>
             <a:r>
-              <a:rPr lang="en-US" altLang="zh-TW" smtClean="0"/>
+              <a:rPr lang="en-US" altLang="zh-TW"/>
               <a:t>Fifth level</a:t>
             </a:r>
             <a:endParaRPr lang="zh-TW" altLang="en-US"/>
@@ -1739,7 +1762,7 @@
           <a:p>
             <a:fld id="{AA12F21D-92BA-4313-92D1-A04658EBF3C3}" type="datetimeFigureOut">
               <a:rPr lang="en-US" smtClean="0"/>
-              <a:t>9/26/2019</a:t>
+              <a:t>6/27/2025</a:t>
             </a:fld>
             <a:endParaRPr lang="en-US"/>
           </a:p>
@@ -1828,7 +1851,7 @@
           <a:lstStyle/>
           <a:p>
             <a:r>
-              <a:rPr lang="en-US" altLang="zh-TW" smtClean="0"/>
+              <a:rPr lang="en-US" altLang="zh-TW"/>
               <a:t>Click to edit Master title style</a:t>
             </a:r>
             <a:endParaRPr lang="zh-TW" altLang="en-US"/>
@@ -1852,7 +1875,7 @@
           <a:p>
             <a:fld id="{AA12F21D-92BA-4313-92D1-A04658EBF3C3}" type="datetimeFigureOut">
               <a:rPr lang="en-US" smtClean="0"/>
-              <a:t>9/26/2019</a:t>
+              <a:t>6/27/2025</a:t>
             </a:fld>
             <a:endParaRPr lang="en-US"/>
           </a:p>
@@ -1942,7 +1965,7 @@
           <a:p>
             <a:fld id="{AA12F21D-92BA-4313-92D1-A04658EBF3C3}" type="datetimeFigureOut">
               <a:rPr lang="en-US" smtClean="0"/>
-              <a:t>9/26/2019</a:t>
+              <a:t>6/27/2025</a:t>
             </a:fld>
             <a:endParaRPr lang="en-US"/>
           </a:p>
@@ -2040,7 +2063,7 @@
           </a:lstStyle>
           <a:p>
             <a:r>
-              <a:rPr lang="en-US" altLang="zh-TW" smtClean="0"/>
+              <a:rPr lang="en-US" altLang="zh-TW"/>
               <a:t>Click to edit Master title style</a:t>
             </a:r>
             <a:endParaRPr lang="zh-TW" altLang="en-US"/>
@@ -2097,35 +2120,35 @@
           <a:p>
             <a:pPr lvl="0"/>
             <a:r>
-              <a:rPr lang="en-US" altLang="zh-TW" smtClean="0"/>
+              <a:rPr lang="en-US" altLang="zh-TW"/>
               <a:t>Click to edit Master text styles</a:t>
             </a:r>
           </a:p>
           <a:p>
             <a:pPr lvl="1"/>
             <a:r>
-              <a:rPr lang="en-US" altLang="zh-TW" smtClean="0"/>
+              <a:rPr lang="en-US" altLang="zh-TW"/>
               <a:t>Second level</a:t>
             </a:r>
           </a:p>
           <a:p>
             <a:pPr lvl="2"/>
             <a:r>
-              <a:rPr lang="en-US" altLang="zh-TW" smtClean="0"/>
+              <a:rPr lang="en-US" altLang="zh-TW"/>
               <a:t>Third level</a:t>
             </a:r>
           </a:p>
           <a:p>
             <a:pPr lvl="3"/>
             <a:r>
-              <a:rPr lang="en-US" altLang="zh-TW" smtClean="0"/>
+              <a:rPr lang="en-US" altLang="zh-TW"/>
               <a:t>Fourth level</a:t>
             </a:r>
           </a:p>
           <a:p>
             <a:pPr lvl="4"/>
             <a:r>
-              <a:rPr lang="en-US" altLang="zh-TW" smtClean="0"/>
+              <a:rPr lang="en-US" altLang="zh-TW"/>
               <a:t>Fifth level</a:t>
             </a:r>
             <a:endParaRPr lang="zh-TW" altLang="en-US"/>
@@ -2191,7 +2214,7 @@
           <a:p>
             <a:pPr lvl="0"/>
             <a:r>
-              <a:rPr lang="en-US" altLang="zh-TW" smtClean="0"/>
+              <a:rPr lang="en-US" altLang="zh-TW"/>
               <a:t>Click to edit Master text styles</a:t>
             </a:r>
           </a:p>
@@ -2214,7 +2237,7 @@
           <a:p>
             <a:fld id="{AA12F21D-92BA-4313-92D1-A04658EBF3C3}" type="datetimeFigureOut">
               <a:rPr lang="en-US" smtClean="0"/>
-              <a:t>9/26/2019</a:t>
+              <a:t>6/27/2025</a:t>
             </a:fld>
             <a:endParaRPr lang="en-US"/>
           </a:p>
@@ -2312,7 +2335,7 @@
           </a:lstStyle>
           <a:p>
             <a:r>
-              <a:rPr lang="en-US" altLang="zh-TW" smtClean="0"/>
+              <a:rPr lang="en-US" altLang="zh-TW"/>
               <a:t>Click to edit Master title style</a:t>
             </a:r>
             <a:endParaRPr lang="zh-TW" altLang="en-US"/>
@@ -2377,7 +2400,7 @@
           </a:lstStyle>
           <a:p>
             <a:r>
-              <a:rPr lang="en-US" altLang="zh-TW" smtClean="0"/>
+              <a:rPr lang="en-US" altLang="zh-TW"/>
               <a:t>Click icon to add picture</a:t>
             </a:r>
             <a:endParaRPr lang="zh-TW" altLang="en-US"/>
@@ -2443,7 +2466,7 @@
           <a:p>
             <a:pPr lvl="0"/>
             <a:r>
-              <a:rPr lang="en-US" altLang="zh-TW" smtClean="0"/>
+              <a:rPr lang="en-US" altLang="zh-TW"/>
               <a:t>Click to edit Master text styles</a:t>
             </a:r>
           </a:p>
@@ -2466,7 +2489,7 @@
           <a:p>
             <a:fld id="{AA12F21D-92BA-4313-92D1-A04658EBF3C3}" type="datetimeFigureOut">
               <a:rPr lang="en-US" smtClean="0"/>
-              <a:t>9/26/2019</a:t>
+              <a:t>6/27/2025</a:t>
             </a:fld>
             <a:endParaRPr lang="en-US"/>
           </a:p>
@@ -2575,10 +2598,9 @@
           <a:lstStyle/>
           <a:p>
             <a:r>
-              <a:rPr lang="zh-TW" altLang="en-US" smtClean="0"/>
+              <a:rPr lang="zh-TW" altLang="en-US"/>
               <a:t>按一下以編輯母片標題樣式</a:t>
             </a:r>
-            <a:endParaRPr lang="zh-TW" altLang="en-US"/>
           </a:p>
         </p:txBody>
       </p:sp>
@@ -2609,38 +2631,37 @@
           <a:p>
             <a:pPr lvl="0"/>
             <a:r>
-              <a:rPr lang="zh-TW" altLang="en-US" smtClean="0"/>
+              <a:rPr lang="zh-TW" altLang="en-US"/>
               <a:t>按一下以編輯母片文字樣式</a:t>
             </a:r>
           </a:p>
           <a:p>
             <a:pPr lvl="1"/>
             <a:r>
-              <a:rPr lang="zh-TW" altLang="en-US" smtClean="0"/>
+              <a:rPr lang="zh-TW" altLang="en-US"/>
               <a:t>第二層</a:t>
             </a:r>
           </a:p>
           <a:p>
             <a:pPr lvl="2"/>
             <a:r>
-              <a:rPr lang="zh-TW" altLang="en-US" smtClean="0"/>
+              <a:rPr lang="zh-TW" altLang="en-US"/>
               <a:t>第三層</a:t>
             </a:r>
           </a:p>
           <a:p>
             <a:pPr lvl="3"/>
             <a:r>
-              <a:rPr lang="zh-TW" altLang="en-US" smtClean="0"/>
+              <a:rPr lang="zh-TW" altLang="en-US"/>
               <a:t>第四層</a:t>
             </a:r>
           </a:p>
           <a:p>
             <a:pPr lvl="4"/>
             <a:r>
-              <a:rPr lang="zh-TW" altLang="en-US" smtClean="0"/>
+              <a:rPr lang="zh-TW" altLang="en-US"/>
               <a:t>第五層</a:t>
             </a:r>
-            <a:endParaRPr lang="zh-TW" altLang="en-US"/>
           </a:p>
         </p:txBody>
       </p:sp>
@@ -2679,7 +2700,7 @@
           <a:p>
             <a:fld id="{AA12F21D-92BA-4313-92D1-A04658EBF3C3}" type="datetimeFigureOut">
               <a:rPr lang="en-US" smtClean="0"/>
-              <a:t>9/26/2019</a:t>
+              <a:t>6/27/2025</a:t>
             </a:fld>
             <a:endParaRPr lang="en-US"/>
           </a:p>
@@ -3051,7 +3072,7 @@
       </p:grpSpPr>
       <p:sp>
         <p:nvSpPr>
-          <p:cNvPr id="2" name="Title 1"/>
+          <p:cNvPr id="4" name="標題 3"/>
           <p:cNvSpPr>
             <a:spLocks noGrp="1"/>
           </p:cNvSpPr>
@@ -3059,154 +3080,144 @@
             <p:ph type="title"/>
           </p:nvPr>
         </p:nvSpPr>
-        <p:spPr/>
+        <p:spPr>
+          <a:xfrm>
+            <a:off x="0" y="1995686"/>
+            <a:ext cx="9144000" cy="857250"/>
+          </a:xfrm>
+        </p:spPr>
         <p:txBody>
           <a:bodyPr>
+            <a:noAutofit/>
+          </a:bodyPr>
+          <a:lstStyle/>
+          <a:p>
+            <a:r>
+              <a:rPr lang="zh-TW" altLang="en-US" sz="5400" b="1" i="1" dirty="0">
+                <a:solidFill>
+                  <a:srgbClr val="660033"/>
+                </a:solidFill>
+                <a:effectLst>
+                  <a:outerShdw blurRad="38100" dist="38100" dir="2700000" algn="tl">
+                    <a:srgbClr val="000000">
+                      <a:alpha val="43137"/>
+                    </a:srgbClr>
+                  </a:outerShdw>
+                </a:effectLst>
+                <a:latin typeface="微軟正黑體" pitchFamily="34" charset="-120"/>
+                <a:ea typeface="微軟正黑體" pitchFamily="34" charset="-120"/>
+              </a:rPr>
+              <a:t>藉我賜恩福</a:t>
+            </a:r>
+          </a:p>
+        </p:txBody>
+      </p:sp>
+    </p:spTree>
+  </p:cSld>
+  <p:clrMapOvr>
+    <a:masterClrMapping/>
+  </p:clrMapOvr>
+</p:sld>
+</file>
+
+<file path=ppt/slides/slide10.xml><?xml version="1.0" encoding="utf-8"?>
+<p:sld xmlns:a="http://schemas.openxmlformats.org/drawingml/2006/main" xmlns:r="http://schemas.openxmlformats.org/officeDocument/2006/relationships" xmlns:p="http://schemas.openxmlformats.org/presentationml/2006/main">
+  <p:cSld>
+    <p:spTree>
+      <p:nvGrpSpPr>
+        <p:cNvPr id="1" name="">
+          <a:extLst>
+            <a:ext uri="{FF2B5EF4-FFF2-40B4-BE49-F238E27FC236}">
+              <a16:creationId xmlns:a16="http://schemas.microsoft.com/office/drawing/2014/main" id="{BA30CE5F-0F4D-A39E-A447-E899B61097EF}"/>
+            </a:ext>
+          </a:extLst>
+        </p:cNvPr>
+        <p:cNvGrpSpPr/>
+        <p:nvPr/>
+      </p:nvGrpSpPr>
+      <p:grpSpPr>
+        <a:xfrm>
+          <a:off x="0" y="0"/>
+          <a:ext cx="0" cy="0"/>
+          <a:chOff x="0" y="0"/>
+          <a:chExt cx="0" cy="0"/>
+        </a:xfrm>
+      </p:grpSpPr>
+      <p:sp>
+        <p:nvSpPr>
+          <p:cNvPr id="5" name="內容版面配置區 4">
+            <a:extLst>
+              <a:ext uri="{FF2B5EF4-FFF2-40B4-BE49-F238E27FC236}">
+                <a16:creationId xmlns:a16="http://schemas.microsoft.com/office/drawing/2014/main" id="{77A238AA-00F3-C725-3F4B-B76C06008FAC}"/>
+              </a:ext>
+            </a:extLst>
+          </p:cNvPr>
+          <p:cNvSpPr>
+            <a:spLocks noGrp="1"/>
+          </p:cNvSpPr>
+          <p:nvPr>
+            <p:ph idx="1"/>
+          </p:nvPr>
+        </p:nvSpPr>
+        <p:spPr>
+          <a:xfrm>
+            <a:off x="0" y="1563639"/>
+            <a:ext cx="9144000" cy="1803647"/>
+          </a:xfrm>
+        </p:spPr>
+        <p:txBody>
+          <a:bodyPr anchor="ctr">
             <a:normAutofit/>
           </a:bodyPr>
           <a:lstStyle/>
           <a:p>
-            <a:r>
-              <a:rPr lang="zh-CN" altLang="en-US" sz="4000" b="1" dirty="0">
+            <a:pPr marL="0" indent="0" algn="ctr">
+              <a:buNone/>
+            </a:pPr>
+            <a:r>
+              <a:rPr lang="zh-TW" altLang="en-US" sz="4800" b="1" dirty="0">
+                <a:solidFill>
+                  <a:srgbClr val="660033"/>
+                </a:solidFill>
                 <a:latin typeface="Microsoft JhengHei" pitchFamily="34" charset="-120"/>
                 <a:ea typeface="Microsoft JhengHei" pitchFamily="34" charset="-120"/>
               </a:rPr>
-              <a:t>藉我賜恩福</a:t>
-            </a:r>
-            <a:endParaRPr lang="en-US" sz="4000" dirty="0">
-              <a:latin typeface="Microsoft JhengHei" pitchFamily="34" charset="-120"/>
-              <a:ea typeface="Microsoft JhengHei" pitchFamily="34" charset="-120"/>
-            </a:endParaRPr>
-          </a:p>
-        </p:txBody>
-      </p:sp>
-      <p:sp>
-        <p:nvSpPr>
-          <p:cNvPr id="3" name="Content Placeholder 2"/>
-          <p:cNvSpPr>
-            <a:spLocks noGrp="1"/>
-          </p:cNvSpPr>
-          <p:nvPr>
-            <p:ph idx="1"/>
-          </p:nvPr>
-        </p:nvSpPr>
-        <p:spPr/>
-        <p:txBody>
-          <a:bodyPr>
-            <a:noAutofit/>
-          </a:bodyPr>
-          <a:lstStyle/>
+              <a:t>白白得來故要白白施予</a:t>
+            </a:r>
+          </a:p>
           <a:p>
             <a:pPr marL="0" indent="0" algn="ctr">
               <a:buNone/>
             </a:pPr>
             <a:r>
-              <a:rPr lang="zh-CN" altLang="en-US" sz="4800" b="1" dirty="0">
+              <a:rPr lang="zh-TW" altLang="en-US" sz="4800" b="1" dirty="0">
+                <a:solidFill>
+                  <a:srgbClr val="660033"/>
+                </a:solidFill>
                 <a:latin typeface="Microsoft JhengHei" pitchFamily="34" charset="-120"/>
                 <a:ea typeface="Microsoft JhengHei" pitchFamily="34" charset="-120"/>
               </a:rPr>
-              <a:t>在塵世生命崎嶇道路</a:t>
-            </a:r>
-            <a:r>
-              <a:rPr lang="zh-CN" altLang="en-US" sz="4800" b="1" dirty="0" smtClean="0">
-                <a:latin typeface="Microsoft JhengHei" pitchFamily="34" charset="-120"/>
-                <a:ea typeface="Microsoft JhengHei" pitchFamily="34" charset="-120"/>
-              </a:rPr>
-              <a:t>中</a:t>
-            </a:r>
-            <a:endParaRPr lang="en-US" sz="4800" dirty="0">
-              <a:latin typeface="Microsoft JhengHei" pitchFamily="34" charset="-120"/>
-              <a:ea typeface="Microsoft JhengHei" pitchFamily="34" charset="-120"/>
-            </a:endParaRPr>
-          </a:p>
-          <a:p>
-            <a:pPr marL="0" indent="0" algn="ctr">
-              <a:buNone/>
-            </a:pPr>
-            <a:r>
-              <a:rPr lang="zh-CN" altLang="en-US" sz="4800" b="1" dirty="0">
-                <a:latin typeface="Microsoft JhengHei" pitchFamily="34" charset="-120"/>
-                <a:ea typeface="Microsoft JhengHei" pitchFamily="34" charset="-120"/>
-              </a:rPr>
-              <a:t>多少人困倦悲</a:t>
-            </a:r>
-            <a:r>
-              <a:rPr lang="zh-CN" altLang="en-US" sz="4800" b="1" dirty="0" smtClean="0">
-                <a:latin typeface="Microsoft JhengHei" pitchFamily="34" charset="-120"/>
-                <a:ea typeface="Microsoft JhengHei" pitchFamily="34" charset="-120"/>
-              </a:rPr>
-              <a:t>傷</a:t>
-            </a:r>
-            <a:endParaRPr lang="en-US" sz="4800" dirty="0">
-              <a:latin typeface="Microsoft JhengHei" pitchFamily="34" charset="-120"/>
-              <a:ea typeface="Microsoft JhengHei" pitchFamily="34" charset="-120"/>
-            </a:endParaRPr>
-          </a:p>
-          <a:p>
-            <a:pPr marL="0" indent="0" algn="ctr">
-              <a:buNone/>
-            </a:pPr>
-            <a:r>
-              <a:rPr lang="zh-CN" altLang="en-US" sz="4800" b="1" dirty="0">
-                <a:latin typeface="Microsoft JhengHei" pitchFamily="34" charset="-120"/>
-                <a:ea typeface="Microsoft JhengHei" pitchFamily="34" charset="-120"/>
-              </a:rPr>
-              <a:t>黑暗滿</a:t>
-            </a:r>
-            <a:r>
-              <a:rPr lang="zh-CN" altLang="en-US" sz="4800" b="1" dirty="0" smtClean="0">
-                <a:latin typeface="Microsoft JhengHei" pitchFamily="34" charset="-120"/>
-                <a:ea typeface="Microsoft JhengHei" pitchFamily="34" charset="-120"/>
-              </a:rPr>
-              <a:t>佈  快</a:t>
-            </a:r>
-            <a:r>
-              <a:rPr lang="zh-CN" altLang="en-US" sz="4800" b="1" dirty="0">
-                <a:latin typeface="Microsoft JhengHei" pitchFamily="34" charset="-120"/>
-                <a:ea typeface="Microsoft JhengHei" pitchFamily="34" charset="-120"/>
-              </a:rPr>
-              <a:t>把真光照</a:t>
-            </a:r>
-            <a:r>
-              <a:rPr lang="zh-CN" altLang="en-US" sz="4800" b="1" dirty="0" smtClean="0">
-                <a:latin typeface="Microsoft JhengHei" pitchFamily="34" charset="-120"/>
-                <a:ea typeface="Microsoft JhengHei" pitchFamily="34" charset="-120"/>
-              </a:rPr>
-              <a:t>亮</a:t>
-            </a:r>
-            <a:endParaRPr lang="en-US" sz="4800" dirty="0">
-              <a:latin typeface="Microsoft JhengHei" pitchFamily="34" charset="-120"/>
-              <a:ea typeface="Microsoft JhengHei" pitchFamily="34" charset="-120"/>
-            </a:endParaRPr>
-          </a:p>
-          <a:p>
-            <a:pPr marL="0" indent="0" algn="ctr">
-              <a:buNone/>
-            </a:pPr>
-            <a:r>
-              <a:rPr lang="zh-CN" altLang="en-US" sz="4800" b="1" dirty="0">
-                <a:latin typeface="Microsoft JhengHei" pitchFamily="34" charset="-120"/>
-                <a:ea typeface="Microsoft JhengHei" pitchFamily="34" charset="-120"/>
-              </a:rPr>
-              <a:t>使憂傷者變歡暢</a:t>
-            </a:r>
-            <a:endParaRPr lang="en-US" sz="4800" dirty="0">
-              <a:latin typeface="Microsoft JhengHei" pitchFamily="34" charset="-120"/>
-              <a:ea typeface="Microsoft JhengHei" pitchFamily="34" charset="-120"/>
-            </a:endParaRPr>
-          </a:p>
-        </p:txBody>
-      </p:sp>
-      <p:sp>
-        <p:nvSpPr>
-          <p:cNvPr id="4" name="TextBox 3"/>
+              <a:t>當愛人像主愛你</a:t>
+            </a:r>
+          </a:p>
+        </p:txBody>
+      </p:sp>
+      <p:sp>
+        <p:nvSpPr>
+          <p:cNvPr id="3" name="TextBox 2">
+            <a:extLst>
+              <a:ext uri="{FF2B5EF4-FFF2-40B4-BE49-F238E27FC236}">
+                <a16:creationId xmlns:a16="http://schemas.microsoft.com/office/drawing/2014/main" id="{DFC71DA0-5092-C8AA-84B6-FB58751DBC2A}"/>
+              </a:ext>
+            </a:extLst>
+          </p:cNvPr>
           <p:cNvSpPr txBox="1"/>
           <p:nvPr/>
         </p:nvSpPr>
         <p:spPr>
           <a:xfrm>
-            <a:off x="609600" y="1230924"/>
-            <a:ext cx="914400" cy="769441"/>
+            <a:off x="0" y="3795887"/>
+            <a:ext cx="9144000" cy="461665"/>
           </a:xfrm>
           <a:prstGeom prst="rect">
             <a:avLst/>
@@ -3219,16 +3230,159 @@
           </a:bodyPr>
           <a:lstStyle/>
           <a:p>
-            <a:r>
-              <a:rPr lang="en-US" sz="4400" b="1" dirty="0">
+            <a:pPr algn="ctr"/>
+            <a:r>
+              <a:rPr lang="en-US" sz="2400" b="1" dirty="0">
+                <a:solidFill>
+                  <a:srgbClr val="660033"/>
+                </a:solidFill>
+              </a:rPr>
+              <a:t>( 3 / 3 )</a:t>
+            </a:r>
+            <a:endParaRPr lang="vi-VN" sz="2400" b="1" dirty="0">
+              <a:solidFill>
+                <a:srgbClr val="660033"/>
+              </a:solidFill>
+            </a:endParaRPr>
+          </a:p>
+        </p:txBody>
+      </p:sp>
+    </p:spTree>
+    <p:extLst>
+      <p:ext uri="{BB962C8B-B14F-4D97-AF65-F5344CB8AC3E}">
+        <p14:creationId xmlns:p14="http://schemas.microsoft.com/office/powerpoint/2010/main" val="1264185428"/>
+      </p:ext>
+    </p:extLst>
+  </p:cSld>
+  <p:clrMapOvr>
+    <a:masterClrMapping/>
+  </p:clrMapOvr>
+</p:sld>
+</file>
+
+<file path=ppt/slides/slide11.xml><?xml version="1.0" encoding="utf-8"?>
+<p:sld xmlns:a="http://schemas.openxmlformats.org/drawingml/2006/main" xmlns:r="http://schemas.openxmlformats.org/officeDocument/2006/relationships" xmlns:p="http://schemas.openxmlformats.org/presentationml/2006/main">
+  <p:cSld>
+    <p:spTree>
+      <p:nvGrpSpPr>
+        <p:cNvPr id="1" name="">
+          <a:extLst>
+            <a:ext uri="{FF2B5EF4-FFF2-40B4-BE49-F238E27FC236}">
+              <a16:creationId xmlns:a16="http://schemas.microsoft.com/office/drawing/2014/main" id="{8006768D-1569-C486-4820-2B4B49782931}"/>
+            </a:ext>
+          </a:extLst>
+        </p:cNvPr>
+        <p:cNvGrpSpPr/>
+        <p:nvPr/>
+      </p:nvGrpSpPr>
+      <p:grpSpPr>
+        <a:xfrm>
+          <a:off x="0" y="0"/>
+          <a:ext cx="0" cy="0"/>
+          <a:chOff x="0" y="0"/>
+          <a:chExt cx="0" cy="0"/>
+        </a:xfrm>
+      </p:grpSpPr>
+      <p:sp>
+        <p:nvSpPr>
+          <p:cNvPr id="5" name="內容版面配置區 4">
+            <a:extLst>
+              <a:ext uri="{FF2B5EF4-FFF2-40B4-BE49-F238E27FC236}">
+                <a16:creationId xmlns:a16="http://schemas.microsoft.com/office/drawing/2014/main" id="{922C4B27-B868-63DF-A4EE-F2058B0A0213}"/>
+              </a:ext>
+            </a:extLst>
+          </p:cNvPr>
+          <p:cNvSpPr>
+            <a:spLocks noGrp="1"/>
+          </p:cNvSpPr>
+          <p:nvPr>
+            <p:ph idx="1"/>
+          </p:nvPr>
+        </p:nvSpPr>
+        <p:spPr>
+          <a:xfrm>
+            <a:off x="0" y="1563639"/>
+            <a:ext cx="9144000" cy="1803647"/>
+          </a:xfrm>
+        </p:spPr>
+        <p:txBody>
+          <a:bodyPr anchor="ctr">
+            <a:normAutofit/>
+          </a:bodyPr>
+          <a:lstStyle/>
+          <a:p>
+            <a:pPr marL="0" indent="0" algn="ctr">
+              <a:buNone/>
+            </a:pPr>
+            <a:r>
+              <a:rPr lang="zh-TW" altLang="en-US" sz="4800" b="1" dirty="0">
+                <a:solidFill>
+                  <a:srgbClr val="660033"/>
+                </a:solidFill>
                 <a:latin typeface="Microsoft JhengHei" pitchFamily="34" charset="-120"/>
                 <a:ea typeface="Microsoft JhengHei" pitchFamily="34" charset="-120"/>
               </a:rPr>
-              <a:t>1.</a:t>
-            </a:r>
-            <a:endParaRPr lang="en-US" sz="4400" b="1" dirty="0">
-              <a:latin typeface="Microsoft JhengHei" pitchFamily="34" charset="-120"/>
-              <a:ea typeface="Microsoft JhengHei" pitchFamily="34" charset="-120"/>
+              <a:t>攙扶軟弱者務要盡心力</a:t>
+            </a:r>
+          </a:p>
+          <a:p>
+            <a:pPr marL="0" indent="0" algn="ctr">
+              <a:buNone/>
+            </a:pPr>
+            <a:r>
+              <a:rPr lang="zh-TW" altLang="en-US" sz="4800" b="1" dirty="0">
+                <a:solidFill>
+                  <a:srgbClr val="660033"/>
+                </a:solidFill>
+                <a:latin typeface="Microsoft JhengHei" pitchFamily="34" charset="-120"/>
+                <a:ea typeface="Microsoft JhengHei" pitchFamily="34" charset="-120"/>
+              </a:rPr>
+              <a:t>忠於主始終如一</a:t>
+            </a:r>
+          </a:p>
+        </p:txBody>
+      </p:sp>
+      <p:sp>
+        <p:nvSpPr>
+          <p:cNvPr id="3" name="TextBox 2">
+            <a:extLst>
+              <a:ext uri="{FF2B5EF4-FFF2-40B4-BE49-F238E27FC236}">
+                <a16:creationId xmlns:a16="http://schemas.microsoft.com/office/drawing/2014/main" id="{A12C9FBC-443B-7A5B-ACAF-569191A607DD}"/>
+              </a:ext>
+            </a:extLst>
+          </p:cNvPr>
+          <p:cNvSpPr txBox="1"/>
+          <p:nvPr/>
+        </p:nvSpPr>
+        <p:spPr>
+          <a:xfrm>
+            <a:off x="0" y="3795887"/>
+            <a:ext cx="9144000" cy="461665"/>
+          </a:xfrm>
+          <a:prstGeom prst="rect">
+            <a:avLst/>
+          </a:prstGeom>
+          <a:noFill/>
+        </p:spPr>
+        <p:txBody>
+          <a:bodyPr wrap="square" rtlCol="0">
+            <a:spAutoFit/>
+          </a:bodyPr>
+          <a:lstStyle/>
+          <a:p>
+            <a:pPr algn="ctr"/>
+            <a:r>
+              <a:rPr lang="en-US" sz="2400" b="1" dirty="0">
+                <a:solidFill>
+                  <a:srgbClr val="660033"/>
+                </a:solidFill>
+              </a:rPr>
+              <a:t>( 3 / 3 )</a:t>
+            </a:r>
+            <a:endParaRPr lang="vi-VN" sz="2400" b="1" dirty="0">
+              <a:solidFill>
+                <a:srgbClr val="660033"/>
+              </a:solidFill>
             </a:endParaRPr>
           </a:p>
         </p:txBody>
@@ -3236,7 +3390,197 @@
     </p:spTree>
     <p:extLst>
       <p:ext uri="{BB962C8B-B14F-4D97-AF65-F5344CB8AC3E}">
-        <p14:creationId xmlns:p14="http://schemas.microsoft.com/office/powerpoint/2010/main" val="2133148573"/>
+        <p14:creationId xmlns:p14="http://schemas.microsoft.com/office/powerpoint/2010/main" val="4045603975"/>
+      </p:ext>
+    </p:extLst>
+  </p:cSld>
+  <p:clrMapOvr>
+    <a:masterClrMapping/>
+  </p:clrMapOvr>
+</p:sld>
+</file>
+
+<file path=ppt/slides/slide12.xml><?xml version="1.0" encoding="utf-8"?>
+<p:sld xmlns:a="http://schemas.openxmlformats.org/drawingml/2006/main" xmlns:r="http://schemas.openxmlformats.org/officeDocument/2006/relationships" xmlns:p="http://schemas.openxmlformats.org/presentationml/2006/main">
+  <p:cSld>
+    <p:spTree>
+      <p:nvGrpSpPr>
+        <p:cNvPr id="1" name="">
+          <a:extLst>
+            <a:ext uri="{FF2B5EF4-FFF2-40B4-BE49-F238E27FC236}">
+              <a16:creationId xmlns:a16="http://schemas.microsoft.com/office/drawing/2014/main" id="{B080A7F6-50C9-91BC-2F7A-DD1F9423CAF8}"/>
+            </a:ext>
+          </a:extLst>
+        </p:cNvPr>
+        <p:cNvGrpSpPr/>
+        <p:nvPr/>
+      </p:nvGrpSpPr>
+      <p:grpSpPr>
+        <a:xfrm>
+          <a:off x="0" y="0"/>
+          <a:ext cx="0" cy="0"/>
+          <a:chOff x="0" y="0"/>
+          <a:chExt cx="0" cy="0"/>
+        </a:xfrm>
+      </p:grpSpPr>
+      <p:sp>
+        <p:nvSpPr>
+          <p:cNvPr id="5" name="內容版面配置區 4">
+            <a:extLst>
+              <a:ext uri="{FF2B5EF4-FFF2-40B4-BE49-F238E27FC236}">
+                <a16:creationId xmlns:a16="http://schemas.microsoft.com/office/drawing/2014/main" id="{9CC4DDD9-5EC8-BB84-F8C8-EC797BADE807}"/>
+              </a:ext>
+            </a:extLst>
+          </p:cNvPr>
+          <p:cNvSpPr>
+            <a:spLocks noGrp="1"/>
+          </p:cNvSpPr>
+          <p:nvPr>
+            <p:ph idx="1"/>
+          </p:nvPr>
+        </p:nvSpPr>
+        <p:spPr>
+          <a:xfrm>
+            <a:off x="0" y="1563639"/>
+            <a:ext cx="9144000" cy="1803647"/>
+          </a:xfrm>
+        </p:spPr>
+        <p:txBody>
+          <a:bodyPr anchor="ctr">
+            <a:normAutofit/>
+          </a:bodyPr>
+          <a:lstStyle/>
+          <a:p>
+            <a:pPr marL="0" indent="0" algn="ctr">
+              <a:buNone/>
+            </a:pPr>
+            <a:r>
+              <a:rPr lang="zh-TW" altLang="en-US" sz="4800" b="1" dirty="0">
+                <a:solidFill>
+                  <a:srgbClr val="660033"/>
+                </a:solidFill>
+                <a:latin typeface="Microsoft JhengHei" pitchFamily="34" charset="-120"/>
+                <a:ea typeface="Microsoft JhengHei" pitchFamily="34" charset="-120"/>
+              </a:rPr>
+              <a:t>藉我賜恩福  藉我賜恩福</a:t>
+            </a:r>
+          </a:p>
+          <a:p>
+            <a:pPr marL="0" indent="0" algn="ctr">
+              <a:buNone/>
+            </a:pPr>
+            <a:r>
+              <a:rPr lang="zh-TW" altLang="en-US" sz="4800" b="1" dirty="0">
+                <a:solidFill>
+                  <a:srgbClr val="660033"/>
+                </a:solidFill>
+                <a:latin typeface="Microsoft JhengHei" pitchFamily="34" charset="-120"/>
+                <a:ea typeface="Microsoft JhengHei" pitchFamily="34" charset="-120"/>
+              </a:rPr>
+              <a:t>藉我生命  榮耀主名</a:t>
+            </a:r>
+          </a:p>
+        </p:txBody>
+      </p:sp>
+    </p:spTree>
+    <p:extLst>
+      <p:ext uri="{BB962C8B-B14F-4D97-AF65-F5344CB8AC3E}">
+        <p14:creationId xmlns:p14="http://schemas.microsoft.com/office/powerpoint/2010/main" val="4150353879"/>
+      </p:ext>
+    </p:extLst>
+  </p:cSld>
+  <p:clrMapOvr>
+    <a:masterClrMapping/>
+  </p:clrMapOvr>
+</p:sld>
+</file>
+
+<file path=ppt/slides/slide13.xml><?xml version="1.0" encoding="utf-8"?>
+<p:sld xmlns:a="http://schemas.openxmlformats.org/drawingml/2006/main" xmlns:r="http://schemas.openxmlformats.org/officeDocument/2006/relationships" xmlns:p="http://schemas.openxmlformats.org/presentationml/2006/main">
+  <p:cSld>
+    <p:spTree>
+      <p:nvGrpSpPr>
+        <p:cNvPr id="1" name="">
+          <a:extLst>
+            <a:ext uri="{FF2B5EF4-FFF2-40B4-BE49-F238E27FC236}">
+              <a16:creationId xmlns:a16="http://schemas.microsoft.com/office/drawing/2014/main" id="{0171E01F-3A7F-ADEC-2EE3-B08C389F32E7}"/>
+            </a:ext>
+          </a:extLst>
+        </p:cNvPr>
+        <p:cNvGrpSpPr/>
+        <p:nvPr/>
+      </p:nvGrpSpPr>
+      <p:grpSpPr>
+        <a:xfrm>
+          <a:off x="0" y="0"/>
+          <a:ext cx="0" cy="0"/>
+          <a:chOff x="0" y="0"/>
+          <a:chExt cx="0" cy="0"/>
+        </a:xfrm>
+      </p:grpSpPr>
+      <p:sp>
+        <p:nvSpPr>
+          <p:cNvPr id="5" name="內容版面配置區 4">
+            <a:extLst>
+              <a:ext uri="{FF2B5EF4-FFF2-40B4-BE49-F238E27FC236}">
+                <a16:creationId xmlns:a16="http://schemas.microsoft.com/office/drawing/2014/main" id="{7FE43F17-A72E-1DAA-5C79-C9C23833214A}"/>
+              </a:ext>
+            </a:extLst>
+          </p:cNvPr>
+          <p:cNvSpPr>
+            <a:spLocks noGrp="1"/>
+          </p:cNvSpPr>
+          <p:nvPr>
+            <p:ph idx="1"/>
+          </p:nvPr>
+        </p:nvSpPr>
+        <p:spPr>
+          <a:xfrm>
+            <a:off x="0" y="1563639"/>
+            <a:ext cx="9144000" cy="1803647"/>
+          </a:xfrm>
+        </p:spPr>
+        <p:txBody>
+          <a:bodyPr anchor="ctr">
+            <a:normAutofit/>
+          </a:bodyPr>
+          <a:lstStyle/>
+          <a:p>
+            <a:pPr marL="0" indent="0" algn="ctr">
+              <a:buNone/>
+            </a:pPr>
+            <a:r>
+              <a:rPr lang="zh-TW" altLang="en-US" sz="4800" b="1" dirty="0">
+                <a:solidFill>
+                  <a:srgbClr val="660033"/>
+                </a:solidFill>
+                <a:latin typeface="Microsoft JhengHei" pitchFamily="34" charset="-120"/>
+                <a:ea typeface="Microsoft JhengHei" pitchFamily="34" charset="-120"/>
+              </a:rPr>
+              <a:t>藉我賜恩福  救主聽我求</a:t>
+            </a:r>
+          </a:p>
+          <a:p>
+            <a:pPr marL="0" indent="0" algn="ctr">
+              <a:buNone/>
+            </a:pPr>
+            <a:r>
+              <a:rPr lang="zh-TW" altLang="en-US" sz="4800" b="1" dirty="0">
+                <a:solidFill>
+                  <a:srgbClr val="660033"/>
+                </a:solidFill>
+                <a:latin typeface="Microsoft JhengHei" pitchFamily="34" charset="-120"/>
+                <a:ea typeface="Microsoft JhengHei" pitchFamily="34" charset="-120"/>
+              </a:rPr>
+              <a:t>藉我賜恩福  使他人得救</a:t>
+            </a:r>
+          </a:p>
+        </p:txBody>
+      </p:sp>
+    </p:spTree>
+    <p:extLst>
+      <p:ext uri="{BB962C8B-B14F-4D97-AF65-F5344CB8AC3E}">
+        <p14:creationId xmlns:p14="http://schemas.microsoft.com/office/powerpoint/2010/main" val="3633891172"/>
       </p:ext>
     </p:extLst>
   </p:cSld>
@@ -3265,29 +3609,58 @@
       </p:grpSpPr>
       <p:sp>
         <p:nvSpPr>
-          <p:cNvPr id="2" name="Title 1"/>
-          <p:cNvSpPr>
-            <a:spLocks noGrp="1"/>
-          </p:cNvSpPr>
-          <p:nvPr>
-            <p:ph type="title"/>
-          </p:nvPr>
-        </p:nvSpPr>
-        <p:spPr/>
-        <p:txBody>
-          <a:bodyPr>
+          <p:cNvPr id="5" name="內容版面配置區 4"/>
+          <p:cNvSpPr>
+            <a:spLocks noGrp="1"/>
+          </p:cNvSpPr>
+          <p:nvPr>
+            <p:ph idx="1"/>
+          </p:nvPr>
+        </p:nvSpPr>
+        <p:spPr>
+          <a:xfrm>
+            <a:off x="0" y="1563639"/>
+            <a:ext cx="9144000" cy="1803647"/>
+          </a:xfrm>
+        </p:spPr>
+        <p:txBody>
+          <a:bodyPr anchor="ctr">
             <a:normAutofit/>
           </a:bodyPr>
           <a:lstStyle/>
           <a:p>
-            <a:r>
-              <a:rPr lang="zh-CN" altLang="en-US" sz="4000" b="1" dirty="0">
+            <a:pPr marL="0" indent="0" algn="ctr">
+              <a:buNone/>
+            </a:pPr>
+            <a:r>
+              <a:rPr lang="zh-TW" altLang="en-US" sz="4800" b="1" dirty="0">
+                <a:solidFill>
+                  <a:srgbClr val="660033"/>
+                </a:solidFill>
                 <a:latin typeface="Microsoft JhengHei" pitchFamily="34" charset="-120"/>
                 <a:ea typeface="Microsoft JhengHei" pitchFamily="34" charset="-120"/>
               </a:rPr>
-              <a:t>藉我賜恩福</a:t>
-            </a:r>
-            <a:endParaRPr lang="en-US" sz="4000" dirty="0">
+              <a:t>在塵世生命崎嶇道路中</a:t>
+            </a:r>
+          </a:p>
+          <a:p>
+            <a:pPr marL="0" indent="0" algn="ctr">
+              <a:buNone/>
+            </a:pPr>
+            <a:r>
+              <a:rPr lang="zh-TW" altLang="en-US" sz="4800" b="1" dirty="0">
+                <a:solidFill>
+                  <a:srgbClr val="660033"/>
+                </a:solidFill>
+                <a:latin typeface="Microsoft JhengHei" pitchFamily="34" charset="-120"/>
+                <a:ea typeface="Microsoft JhengHei" pitchFamily="34" charset="-120"/>
+              </a:rPr>
+              <a:t>多少人困倦悲傷</a:t>
+            </a:r>
+            <a:endParaRPr lang="en-US" altLang="zh-TW" sz="4800" b="1" dirty="0">
+              <a:solidFill>
+                <a:srgbClr val="660033"/>
+              </a:solidFill>
               <a:latin typeface="Microsoft JhengHei" pitchFamily="34" charset="-120"/>
               <a:ea typeface="Microsoft JhengHei" pitchFamily="34" charset="-120"/>
             </a:endParaRPr>
@@ -3296,159 +3669,39 @@
       </p:sp>
       <p:sp>
         <p:nvSpPr>
-          <p:cNvPr id="3" name="Content Placeholder 2"/>
-          <p:cNvSpPr>
-            <a:spLocks noGrp="1"/>
-          </p:cNvSpPr>
-          <p:nvPr>
-            <p:ph idx="1"/>
-          </p:nvPr>
-        </p:nvSpPr>
-        <p:spPr/>
-        <p:txBody>
-          <a:bodyPr>
-            <a:noAutofit/>
+          <p:cNvPr id="3" name="TextBox 2"/>
+          <p:cNvSpPr txBox="1"/>
+          <p:nvPr/>
+        </p:nvSpPr>
+        <p:spPr>
+          <a:xfrm>
+            <a:off x="0" y="3795887"/>
+            <a:ext cx="9144000" cy="461665"/>
+          </a:xfrm>
+          <a:prstGeom prst="rect">
+            <a:avLst/>
+          </a:prstGeom>
+          <a:noFill/>
+        </p:spPr>
+        <p:txBody>
+          <a:bodyPr wrap="square" rtlCol="0">
+            <a:spAutoFit/>
           </a:bodyPr>
           <a:lstStyle/>
           <a:p>
-            <a:pPr marL="0" indent="0" algn="ctr">
-              <a:buNone/>
-            </a:pPr>
-            <a:r>
-              <a:rPr lang="zh-CN" altLang="en-US" sz="4800" b="1" dirty="0">
-                <a:latin typeface="Microsoft JhengHei" pitchFamily="34" charset="-120"/>
-                <a:ea typeface="Microsoft JhengHei" pitchFamily="34" charset="-120"/>
+            <a:pPr algn="ctr"/>
+            <a:r>
+              <a:rPr lang="en-US" sz="2400" b="1" dirty="0">
+                <a:solidFill>
+                  <a:srgbClr val="660033"/>
+                </a:solidFill>
               </a:rPr>
-              <a:t>藉我賜恩</a:t>
-            </a:r>
-            <a:r>
-              <a:rPr lang="zh-CN" altLang="en-US" sz="4800" b="1" dirty="0">
-                <a:latin typeface="Microsoft JhengHei" pitchFamily="34" charset="-120"/>
-                <a:ea typeface="Microsoft JhengHei" pitchFamily="34" charset="-120"/>
-              </a:rPr>
-              <a:t>福  藉</a:t>
-            </a:r>
-            <a:r>
-              <a:rPr lang="zh-CN" altLang="en-US" sz="4800" b="1" dirty="0">
-                <a:latin typeface="Microsoft JhengHei" pitchFamily="34" charset="-120"/>
-                <a:ea typeface="Microsoft JhengHei" pitchFamily="34" charset="-120"/>
-              </a:rPr>
-              <a:t>我賜恩</a:t>
-            </a:r>
-            <a:r>
-              <a:rPr lang="zh-CN" altLang="en-US" sz="4800" b="1" dirty="0">
-                <a:latin typeface="Microsoft JhengHei" pitchFamily="34" charset="-120"/>
-                <a:ea typeface="Microsoft JhengHei" pitchFamily="34" charset="-120"/>
-              </a:rPr>
-              <a:t>福</a:t>
-            </a:r>
-            <a:endParaRPr lang="en-US" sz="4800" b="1" dirty="0">
-              <a:latin typeface="Microsoft JhengHei" pitchFamily="34" charset="-120"/>
-              <a:ea typeface="Microsoft JhengHei" pitchFamily="34" charset="-120"/>
-            </a:endParaRPr>
-          </a:p>
-          <a:p>
-            <a:pPr marL="0" indent="0" algn="ctr">
-              <a:buNone/>
-            </a:pPr>
-            <a:r>
-              <a:rPr lang="zh-CN" altLang="en-US" sz="4800" b="1" dirty="0">
-                <a:latin typeface="Microsoft JhengHei" pitchFamily="34" charset="-120"/>
-                <a:ea typeface="Microsoft JhengHei" pitchFamily="34" charset="-120"/>
-              </a:rPr>
-              <a:t>藉我生</a:t>
-            </a:r>
-            <a:r>
-              <a:rPr lang="zh-CN" altLang="en-US" sz="4800" b="1" dirty="0">
-                <a:latin typeface="Microsoft JhengHei" pitchFamily="34" charset="-120"/>
-                <a:ea typeface="Microsoft JhengHei" pitchFamily="34" charset="-120"/>
-              </a:rPr>
-              <a:t>命  榮</a:t>
-            </a:r>
-            <a:r>
-              <a:rPr lang="zh-CN" altLang="en-US" sz="4800" b="1" dirty="0">
-                <a:latin typeface="Microsoft JhengHei" pitchFamily="34" charset="-120"/>
-                <a:ea typeface="Microsoft JhengHei" pitchFamily="34" charset="-120"/>
-              </a:rPr>
-              <a:t>耀主</a:t>
-            </a:r>
-            <a:r>
-              <a:rPr lang="zh-CN" altLang="en-US" sz="4800" b="1" dirty="0">
-                <a:latin typeface="Microsoft JhengHei" pitchFamily="34" charset="-120"/>
-                <a:ea typeface="Microsoft JhengHei" pitchFamily="34" charset="-120"/>
-              </a:rPr>
-              <a:t>名</a:t>
-            </a:r>
-            <a:endParaRPr lang="en-US" sz="4800" b="1" dirty="0">
-              <a:latin typeface="Microsoft JhengHei" pitchFamily="34" charset="-120"/>
-              <a:ea typeface="Microsoft JhengHei" pitchFamily="34" charset="-120"/>
-            </a:endParaRPr>
-          </a:p>
-          <a:p>
-            <a:pPr marL="0" indent="0" algn="ctr">
-              <a:buNone/>
-            </a:pPr>
-            <a:r>
-              <a:rPr lang="zh-CN" altLang="en-US" sz="4800" b="1" dirty="0">
-                <a:latin typeface="Microsoft JhengHei" pitchFamily="34" charset="-120"/>
-                <a:ea typeface="Microsoft JhengHei" pitchFamily="34" charset="-120"/>
-              </a:rPr>
-              <a:t>藉我賜恩</a:t>
-            </a:r>
-            <a:r>
-              <a:rPr lang="zh-CN" altLang="en-US" sz="4800" b="1" dirty="0">
-                <a:latin typeface="Microsoft JhengHei" pitchFamily="34" charset="-120"/>
-                <a:ea typeface="Microsoft JhengHei" pitchFamily="34" charset="-120"/>
-              </a:rPr>
-              <a:t>福  救主  聽</a:t>
-            </a:r>
-            <a:r>
-              <a:rPr lang="zh-CN" altLang="en-US" sz="4800" b="1" dirty="0">
-                <a:latin typeface="Microsoft JhengHei" pitchFamily="34" charset="-120"/>
-                <a:ea typeface="Microsoft JhengHei" pitchFamily="34" charset="-120"/>
-              </a:rPr>
-              <a:t>我</a:t>
-            </a:r>
-            <a:r>
-              <a:rPr lang="zh-CN" altLang="en-US" sz="4800" b="1" dirty="0">
-                <a:latin typeface="Microsoft JhengHei" pitchFamily="34" charset="-120"/>
-                <a:ea typeface="Microsoft JhengHei" pitchFamily="34" charset="-120"/>
-              </a:rPr>
-              <a:t>求</a:t>
-            </a:r>
-            <a:endParaRPr lang="en-US" sz="4800" b="1" dirty="0">
-              <a:latin typeface="Microsoft JhengHei" pitchFamily="34" charset="-120"/>
-              <a:ea typeface="Microsoft JhengHei" pitchFamily="34" charset="-120"/>
-            </a:endParaRPr>
-          </a:p>
-          <a:p>
-            <a:pPr marL="0" indent="0" algn="ctr">
-              <a:buNone/>
-            </a:pPr>
-            <a:r>
-              <a:rPr lang="zh-CN" altLang="en-US" sz="4800" b="1" dirty="0">
-                <a:latin typeface="Microsoft JhengHei" pitchFamily="34" charset="-120"/>
-                <a:ea typeface="Microsoft JhengHei" pitchFamily="34" charset="-120"/>
-              </a:rPr>
-              <a:t>藉我賜恩</a:t>
-            </a:r>
-            <a:r>
-              <a:rPr lang="zh-CN" altLang="en-US" sz="4800" b="1" dirty="0">
-                <a:latin typeface="Microsoft JhengHei" pitchFamily="34" charset="-120"/>
-                <a:ea typeface="Microsoft JhengHei" pitchFamily="34" charset="-120"/>
-              </a:rPr>
-              <a:t>福  使</a:t>
-            </a:r>
-            <a:r>
-              <a:rPr lang="zh-CN" altLang="en-US" sz="4800" b="1" dirty="0">
-                <a:latin typeface="Microsoft JhengHei" pitchFamily="34" charset="-120"/>
-                <a:ea typeface="Microsoft JhengHei" pitchFamily="34" charset="-120"/>
-              </a:rPr>
-              <a:t>他人得救</a:t>
-            </a:r>
-            <a:endParaRPr lang="en-US" sz="4800" b="1" dirty="0">
-              <a:latin typeface="Microsoft JhengHei" pitchFamily="34" charset="-120"/>
-              <a:ea typeface="Microsoft JhengHei" pitchFamily="34" charset="-120"/>
+              <a:t>( 1 / 3 )</a:t>
+            </a:r>
+            <a:endParaRPr lang="vi-VN" sz="2400" b="1" dirty="0">
+              <a:solidFill>
+                <a:srgbClr val="660033"/>
+              </a:solidFill>
             </a:endParaRPr>
           </a:p>
         </p:txBody>
@@ -3456,7 +3709,7 @@
     </p:spTree>
     <p:extLst>
       <p:ext uri="{BB962C8B-B14F-4D97-AF65-F5344CB8AC3E}">
-        <p14:creationId xmlns:p14="http://schemas.microsoft.com/office/powerpoint/2010/main" val="4072731275"/>
+        <p14:creationId xmlns:p14="http://schemas.microsoft.com/office/powerpoint/2010/main" val="1407003638"/>
       </p:ext>
     </p:extLst>
   </p:cSld>
@@ -3471,7 +3724,13 @@
   <p:cSld>
     <p:spTree>
       <p:nvGrpSpPr>
-        <p:cNvPr id="1" name=""/>
+        <p:cNvPr id="1" name="">
+          <a:extLst>
+            <a:ext uri="{FF2B5EF4-FFF2-40B4-BE49-F238E27FC236}">
+              <a16:creationId xmlns:a16="http://schemas.microsoft.com/office/drawing/2014/main" id="{113E28D6-B94D-E131-D867-E5FAEF623D16}"/>
+            </a:ext>
+          </a:extLst>
+        </p:cNvPr>
         <p:cNvGrpSpPr/>
         <p:nvPr/>
       </p:nvGrpSpPr>
@@ -3485,148 +3744,79 @@
       </p:grpSpPr>
       <p:sp>
         <p:nvSpPr>
-          <p:cNvPr id="2" name="Title 1"/>
-          <p:cNvSpPr>
-            <a:spLocks noGrp="1"/>
-          </p:cNvSpPr>
-          <p:nvPr>
-            <p:ph type="title"/>
-          </p:nvPr>
-        </p:nvSpPr>
-        <p:spPr/>
-        <p:txBody>
-          <a:bodyPr>
+          <p:cNvPr id="5" name="內容版面配置區 4">
+            <a:extLst>
+              <a:ext uri="{FF2B5EF4-FFF2-40B4-BE49-F238E27FC236}">
+                <a16:creationId xmlns:a16="http://schemas.microsoft.com/office/drawing/2014/main" id="{33BC14BA-C695-11BB-2F14-ED2D709430F9}"/>
+              </a:ext>
+            </a:extLst>
+          </p:cNvPr>
+          <p:cNvSpPr>
+            <a:spLocks noGrp="1"/>
+          </p:cNvSpPr>
+          <p:nvPr>
+            <p:ph idx="1"/>
+          </p:nvPr>
+        </p:nvSpPr>
+        <p:spPr>
+          <a:xfrm>
+            <a:off x="0" y="1563639"/>
+            <a:ext cx="9144000" cy="1803647"/>
+          </a:xfrm>
+        </p:spPr>
+        <p:txBody>
+          <a:bodyPr anchor="ctr">
             <a:normAutofit/>
           </a:bodyPr>
           <a:lstStyle/>
           <a:p>
-            <a:r>
-              <a:rPr lang="zh-CN" altLang="en-US" sz="4000" b="1" dirty="0">
+            <a:pPr marL="0" indent="0" algn="ctr">
+              <a:buNone/>
+            </a:pPr>
+            <a:r>
+              <a:rPr lang="zh-TW" altLang="en-US" sz="4800" b="1" dirty="0">
+                <a:solidFill>
+                  <a:srgbClr val="660033"/>
+                </a:solidFill>
                 <a:latin typeface="Microsoft JhengHei" pitchFamily="34" charset="-120"/>
                 <a:ea typeface="Microsoft JhengHei" pitchFamily="34" charset="-120"/>
               </a:rPr>
-              <a:t>藉我賜恩福</a:t>
-            </a:r>
-            <a:endParaRPr lang="en-US" sz="4000" dirty="0">
-              <a:latin typeface="Microsoft JhengHei" pitchFamily="34" charset="-120"/>
-              <a:ea typeface="Microsoft JhengHei" pitchFamily="34" charset="-120"/>
-            </a:endParaRPr>
-          </a:p>
-        </p:txBody>
-      </p:sp>
-      <p:sp>
-        <p:nvSpPr>
-          <p:cNvPr id="3" name="Content Placeholder 2"/>
-          <p:cNvSpPr>
-            <a:spLocks noGrp="1"/>
-          </p:cNvSpPr>
-          <p:nvPr>
-            <p:ph idx="1"/>
-          </p:nvPr>
-        </p:nvSpPr>
-        <p:spPr/>
-        <p:txBody>
-          <a:bodyPr>
-            <a:noAutofit/>
-          </a:bodyPr>
-          <a:lstStyle/>
+              <a:t>黑暗滿佈  快把真光照亮</a:t>
+            </a:r>
+          </a:p>
           <a:p>
             <a:pPr marL="0" indent="0" algn="ctr">
               <a:buNone/>
             </a:pPr>
             <a:r>
-              <a:rPr lang="zh-CN" altLang="en-US" sz="4800" b="1" dirty="0">
+              <a:rPr lang="zh-TW" altLang="en-US" sz="4800" b="1" dirty="0">
+                <a:solidFill>
+                  <a:srgbClr val="660033"/>
+                </a:solidFill>
                 <a:latin typeface="Microsoft JhengHei" pitchFamily="34" charset="-120"/>
                 <a:ea typeface="Microsoft JhengHei" pitchFamily="34" charset="-120"/>
               </a:rPr>
-              <a:t>述說耶穌基督慈愛故</a:t>
-            </a:r>
-            <a:r>
-              <a:rPr lang="zh-CN" altLang="en-US" sz="4800" b="1" dirty="0">
-                <a:latin typeface="Microsoft JhengHei" pitchFamily="34" charset="-120"/>
-                <a:ea typeface="Microsoft JhengHei" pitchFamily="34" charset="-120"/>
-              </a:rPr>
-              <a:t>事</a:t>
-            </a:r>
-            <a:endParaRPr lang="en-US" sz="4800" b="1" dirty="0">
-              <a:latin typeface="Microsoft JhengHei" pitchFamily="34" charset="-120"/>
-              <a:ea typeface="Microsoft JhengHei" pitchFamily="34" charset="-120"/>
-            </a:endParaRPr>
-          </a:p>
-          <a:p>
-            <a:pPr marL="0" indent="0" algn="ctr">
-              <a:buNone/>
-            </a:pPr>
-            <a:r>
-              <a:rPr lang="zh-CN" altLang="en-US" sz="4800" b="1" dirty="0">
-                <a:latin typeface="Microsoft JhengHei" pitchFamily="34" charset="-120"/>
-                <a:ea typeface="Microsoft JhengHei" pitchFamily="34" charset="-120"/>
-              </a:rPr>
-              <a:t>述說祂赦罪大</a:t>
-            </a:r>
-            <a:r>
-              <a:rPr lang="zh-CN" altLang="en-US" sz="4800" b="1" dirty="0">
-                <a:latin typeface="Microsoft JhengHei" pitchFamily="34" charset="-120"/>
-                <a:ea typeface="Microsoft JhengHei" pitchFamily="34" charset="-120"/>
-              </a:rPr>
-              <a:t>能</a:t>
-            </a:r>
-            <a:endParaRPr lang="en-US" sz="4800" b="1" dirty="0">
-              <a:latin typeface="Microsoft JhengHei" pitchFamily="34" charset="-120"/>
-              <a:ea typeface="Microsoft JhengHei" pitchFamily="34" charset="-120"/>
-            </a:endParaRPr>
-          </a:p>
-          <a:p>
-            <a:pPr marL="0" indent="0" algn="ctr">
-              <a:buNone/>
-            </a:pPr>
-            <a:r>
-              <a:rPr lang="zh-CN" altLang="en-US" sz="4800" b="1" dirty="0">
-                <a:latin typeface="Microsoft JhengHei" pitchFamily="34" charset="-120"/>
-                <a:ea typeface="Microsoft JhengHei" pitchFamily="34" charset="-120"/>
-              </a:rPr>
-              <a:t>別人信祂要藉你去見</a:t>
-            </a:r>
-            <a:r>
-              <a:rPr lang="zh-CN" altLang="en-US" sz="4800" b="1" dirty="0">
-                <a:latin typeface="Microsoft JhengHei" pitchFamily="34" charset="-120"/>
-                <a:ea typeface="Microsoft JhengHei" pitchFamily="34" charset="-120"/>
-              </a:rPr>
-              <a:t>證</a:t>
-            </a:r>
-            <a:endParaRPr lang="en-US" sz="4800" b="1" dirty="0">
-              <a:latin typeface="Microsoft JhengHei" pitchFamily="34" charset="-120"/>
-              <a:ea typeface="Microsoft JhengHei" pitchFamily="34" charset="-120"/>
-            </a:endParaRPr>
-          </a:p>
-          <a:p>
-            <a:pPr marL="0" indent="0" algn="ctr">
-              <a:buNone/>
-            </a:pPr>
-            <a:r>
-              <a:rPr lang="zh-CN" altLang="en-US" sz="4800" b="1" dirty="0">
-                <a:latin typeface="Microsoft JhengHei" pitchFamily="34" charset="-120"/>
-                <a:ea typeface="Microsoft JhengHei" pitchFamily="34" charset="-120"/>
-              </a:rPr>
-              <a:t>生活時刻像明燈</a:t>
-            </a:r>
-            <a:endParaRPr lang="en-US" sz="4800" b="1" dirty="0">
-              <a:latin typeface="Microsoft JhengHei" pitchFamily="34" charset="-120"/>
-              <a:ea typeface="Microsoft JhengHei" pitchFamily="34" charset="-120"/>
-            </a:endParaRPr>
-          </a:p>
-        </p:txBody>
-      </p:sp>
-      <p:sp>
-        <p:nvSpPr>
-          <p:cNvPr id="4" name="TextBox 3"/>
+              <a:t>使憂傷者變歡暢</a:t>
+            </a:r>
+          </a:p>
+        </p:txBody>
+      </p:sp>
+      <p:sp>
+        <p:nvSpPr>
+          <p:cNvPr id="3" name="TextBox 2">
+            <a:extLst>
+              <a:ext uri="{FF2B5EF4-FFF2-40B4-BE49-F238E27FC236}">
+                <a16:creationId xmlns:a16="http://schemas.microsoft.com/office/drawing/2014/main" id="{CAA4064B-CD71-1A96-5997-A990F2A7739B}"/>
+              </a:ext>
+            </a:extLst>
+          </p:cNvPr>
           <p:cNvSpPr txBox="1"/>
           <p:nvPr/>
         </p:nvSpPr>
         <p:spPr>
           <a:xfrm>
-            <a:off x="609600" y="1230924"/>
-            <a:ext cx="914400" cy="769441"/>
+            <a:off x="0" y="3795887"/>
+            <a:ext cx="9144000" cy="461665"/>
           </a:xfrm>
           <a:prstGeom prst="rect">
             <a:avLst/>
@@ -3639,16 +3829,19 @@
           </a:bodyPr>
           <a:lstStyle/>
           <a:p>
-            <a:r>
-              <a:rPr lang="en-US" sz="4400" b="1" dirty="0" smtClean="0">
-                <a:latin typeface="Microsoft JhengHei" pitchFamily="34" charset="-120"/>
-                <a:ea typeface="Microsoft JhengHei" pitchFamily="34" charset="-120"/>
+            <a:pPr algn="ctr"/>
+            <a:r>
+              <a:rPr lang="en-US" sz="2400" b="1" dirty="0">
+                <a:solidFill>
+                  <a:srgbClr val="660033"/>
+                </a:solidFill>
               </a:rPr>
-              <a:t>2.</a:t>
-            </a:r>
-            <a:endParaRPr lang="en-US" sz="4400" b="1" dirty="0">
-              <a:latin typeface="Microsoft JhengHei" pitchFamily="34" charset="-120"/>
-              <a:ea typeface="Microsoft JhengHei" pitchFamily="34" charset="-120"/>
+              <a:t>( 1 / 3 )</a:t>
+            </a:r>
+            <a:endParaRPr lang="vi-VN" sz="2400" b="1" dirty="0">
+              <a:solidFill>
+                <a:srgbClr val="660033"/>
+              </a:solidFill>
             </a:endParaRPr>
           </a:p>
         </p:txBody>
@@ -3656,7 +3849,7 @@
     </p:spTree>
     <p:extLst>
       <p:ext uri="{BB962C8B-B14F-4D97-AF65-F5344CB8AC3E}">
-        <p14:creationId xmlns:p14="http://schemas.microsoft.com/office/powerpoint/2010/main" val="1663623398"/>
+        <p14:creationId xmlns:p14="http://schemas.microsoft.com/office/powerpoint/2010/main" val="1292775432"/>
       </p:ext>
     </p:extLst>
   </p:cSld>
@@ -3671,7 +3864,13 @@
   <p:cSld>
     <p:spTree>
       <p:nvGrpSpPr>
-        <p:cNvPr id="1" name=""/>
+        <p:cNvPr id="1" name="">
+          <a:extLst>
+            <a:ext uri="{FF2B5EF4-FFF2-40B4-BE49-F238E27FC236}">
+              <a16:creationId xmlns:a16="http://schemas.microsoft.com/office/drawing/2014/main" id="{B6F6C1F1-01A2-3006-D253-32F5923A0578}"/>
+            </a:ext>
+          </a:extLst>
+        </p:cNvPr>
         <p:cNvGrpSpPr/>
         <p:nvPr/>
       </p:nvGrpSpPr>
@@ -3685,198 +3884,67 @@
       </p:grpSpPr>
       <p:sp>
         <p:nvSpPr>
-          <p:cNvPr id="2" name="Title 1"/>
-          <p:cNvSpPr>
-            <a:spLocks noGrp="1"/>
-          </p:cNvSpPr>
-          <p:nvPr>
-            <p:ph type="title"/>
-          </p:nvPr>
-        </p:nvSpPr>
-        <p:spPr/>
-        <p:txBody>
-          <a:bodyPr>
+          <p:cNvPr id="5" name="內容版面配置區 4">
+            <a:extLst>
+              <a:ext uri="{FF2B5EF4-FFF2-40B4-BE49-F238E27FC236}">
+                <a16:creationId xmlns:a16="http://schemas.microsoft.com/office/drawing/2014/main" id="{6B968F52-F1DD-52CD-5E1F-6A6854DF3F07}"/>
+              </a:ext>
+            </a:extLst>
+          </p:cNvPr>
+          <p:cNvSpPr>
+            <a:spLocks noGrp="1"/>
+          </p:cNvSpPr>
+          <p:nvPr>
+            <p:ph idx="1"/>
+          </p:nvPr>
+        </p:nvSpPr>
+        <p:spPr>
+          <a:xfrm>
+            <a:off x="0" y="1563639"/>
+            <a:ext cx="9144000" cy="1803647"/>
+          </a:xfrm>
+        </p:spPr>
+        <p:txBody>
+          <a:bodyPr anchor="ctr">
             <a:normAutofit/>
           </a:bodyPr>
           <a:lstStyle/>
           <a:p>
-            <a:r>
-              <a:rPr lang="zh-CN" altLang="en-US" sz="4000" b="1" dirty="0">
+            <a:pPr marL="0" indent="0" algn="ctr">
+              <a:buNone/>
+            </a:pPr>
+            <a:r>
+              <a:rPr lang="zh-TW" altLang="en-US" sz="4800" b="1" dirty="0">
+                <a:solidFill>
+                  <a:srgbClr val="660033"/>
+                </a:solidFill>
                 <a:latin typeface="Microsoft JhengHei" pitchFamily="34" charset="-120"/>
                 <a:ea typeface="Microsoft JhengHei" pitchFamily="34" charset="-120"/>
               </a:rPr>
-              <a:t>藉我賜恩福</a:t>
-            </a:r>
-            <a:endParaRPr lang="en-US" sz="4000" dirty="0">
-              <a:latin typeface="Microsoft JhengHei" pitchFamily="34" charset="-120"/>
-              <a:ea typeface="Microsoft JhengHei" pitchFamily="34" charset="-120"/>
-            </a:endParaRPr>
-          </a:p>
-        </p:txBody>
-      </p:sp>
-      <p:sp>
-        <p:nvSpPr>
-          <p:cNvPr id="3" name="Content Placeholder 2"/>
-          <p:cNvSpPr>
-            <a:spLocks noGrp="1"/>
-          </p:cNvSpPr>
-          <p:nvPr>
-            <p:ph idx="1"/>
-          </p:nvPr>
-        </p:nvSpPr>
-        <p:spPr/>
-        <p:txBody>
-          <a:bodyPr>
-            <a:noAutofit/>
-          </a:bodyPr>
-          <a:lstStyle/>
+              <a:t>藉我賜恩福  藉我賜恩福</a:t>
+            </a:r>
+          </a:p>
           <a:p>
             <a:pPr marL="0" indent="0" algn="ctr">
               <a:buNone/>
             </a:pPr>
             <a:r>
-              <a:rPr lang="zh-CN" altLang="en-US" sz="4800" b="1" dirty="0">
+              <a:rPr lang="zh-TW" altLang="en-US" sz="4800" b="1" dirty="0">
+                <a:solidFill>
+                  <a:srgbClr val="660033"/>
+                </a:solidFill>
                 <a:latin typeface="Microsoft JhengHei" pitchFamily="34" charset="-120"/>
                 <a:ea typeface="Microsoft JhengHei" pitchFamily="34" charset="-120"/>
               </a:rPr>
-              <a:t>藉我賜恩</a:t>
-            </a:r>
-            <a:r>
-              <a:rPr lang="zh-CN" altLang="en-US" sz="4800" b="1" dirty="0">
-                <a:latin typeface="Microsoft JhengHei" pitchFamily="34" charset="-120"/>
-                <a:ea typeface="Microsoft JhengHei" pitchFamily="34" charset="-120"/>
-              </a:rPr>
-              <a:t>福  藉</a:t>
-            </a:r>
-            <a:r>
-              <a:rPr lang="zh-CN" altLang="en-US" sz="4800" b="1" dirty="0">
-                <a:latin typeface="Microsoft JhengHei" pitchFamily="34" charset="-120"/>
-                <a:ea typeface="Microsoft JhengHei" pitchFamily="34" charset="-120"/>
-              </a:rPr>
-              <a:t>我賜恩</a:t>
-            </a:r>
-            <a:r>
-              <a:rPr lang="zh-CN" altLang="en-US" sz="4800" b="1" dirty="0">
-                <a:latin typeface="Microsoft JhengHei" pitchFamily="34" charset="-120"/>
-                <a:ea typeface="Microsoft JhengHei" pitchFamily="34" charset="-120"/>
-              </a:rPr>
-              <a:t>福</a:t>
-            </a:r>
-            <a:endParaRPr lang="en-US" sz="4800" b="1" dirty="0">
-              <a:latin typeface="Microsoft JhengHei" pitchFamily="34" charset="-120"/>
-              <a:ea typeface="Microsoft JhengHei" pitchFamily="34" charset="-120"/>
-            </a:endParaRPr>
-          </a:p>
-          <a:p>
-            <a:pPr marL="0" indent="0" algn="ctr">
-              <a:buNone/>
-            </a:pPr>
-            <a:r>
-              <a:rPr lang="zh-CN" altLang="en-US" sz="4800" b="1" dirty="0">
-                <a:latin typeface="Microsoft JhengHei" pitchFamily="34" charset="-120"/>
-                <a:ea typeface="Microsoft JhengHei" pitchFamily="34" charset="-120"/>
-              </a:rPr>
-              <a:t>藉我生</a:t>
-            </a:r>
-            <a:r>
-              <a:rPr lang="zh-CN" altLang="en-US" sz="4800" b="1" dirty="0">
-                <a:latin typeface="Microsoft JhengHei" pitchFamily="34" charset="-120"/>
-                <a:ea typeface="Microsoft JhengHei" pitchFamily="34" charset="-120"/>
-              </a:rPr>
-              <a:t>命  榮</a:t>
-            </a:r>
-            <a:r>
-              <a:rPr lang="zh-CN" altLang="en-US" sz="4800" b="1" dirty="0">
-                <a:latin typeface="Microsoft JhengHei" pitchFamily="34" charset="-120"/>
-                <a:ea typeface="Microsoft JhengHei" pitchFamily="34" charset="-120"/>
-              </a:rPr>
-              <a:t>耀主</a:t>
-            </a:r>
-            <a:r>
-              <a:rPr lang="zh-CN" altLang="en-US" sz="4800" b="1" dirty="0">
-                <a:latin typeface="Microsoft JhengHei" pitchFamily="34" charset="-120"/>
-                <a:ea typeface="Microsoft JhengHei" pitchFamily="34" charset="-120"/>
-              </a:rPr>
-              <a:t>名</a:t>
-            </a:r>
-            <a:endParaRPr lang="en-US" sz="4800" b="1" dirty="0">
-              <a:latin typeface="Microsoft JhengHei" pitchFamily="34" charset="-120"/>
-              <a:ea typeface="Microsoft JhengHei" pitchFamily="34" charset="-120"/>
-            </a:endParaRPr>
-          </a:p>
-          <a:p>
-            <a:pPr marL="0" indent="0" algn="ctr">
-              <a:buNone/>
-            </a:pPr>
-            <a:r>
-              <a:rPr lang="zh-CN" altLang="en-US" sz="4800" b="1" dirty="0">
-                <a:latin typeface="Microsoft JhengHei" pitchFamily="34" charset="-120"/>
-                <a:ea typeface="Microsoft JhengHei" pitchFamily="34" charset="-120"/>
-              </a:rPr>
-              <a:t>藉我賜恩</a:t>
-            </a:r>
-            <a:r>
-              <a:rPr lang="zh-CN" altLang="en-US" sz="4800" b="1" dirty="0">
-                <a:latin typeface="Microsoft JhengHei" pitchFamily="34" charset="-120"/>
-                <a:ea typeface="Microsoft JhengHei" pitchFamily="34" charset="-120"/>
-              </a:rPr>
-              <a:t>福  救主  聽</a:t>
-            </a:r>
-            <a:r>
-              <a:rPr lang="zh-CN" altLang="en-US" sz="4800" b="1" dirty="0">
-                <a:latin typeface="Microsoft JhengHei" pitchFamily="34" charset="-120"/>
-                <a:ea typeface="Microsoft JhengHei" pitchFamily="34" charset="-120"/>
-              </a:rPr>
-              <a:t>我</a:t>
-            </a:r>
-            <a:r>
-              <a:rPr lang="zh-CN" altLang="en-US" sz="4800" b="1" dirty="0">
-                <a:latin typeface="Microsoft JhengHei" pitchFamily="34" charset="-120"/>
-                <a:ea typeface="Microsoft JhengHei" pitchFamily="34" charset="-120"/>
-              </a:rPr>
-              <a:t>求</a:t>
-            </a:r>
-            <a:endParaRPr lang="en-US" sz="4800" b="1" dirty="0">
-              <a:latin typeface="Microsoft JhengHei" pitchFamily="34" charset="-120"/>
-              <a:ea typeface="Microsoft JhengHei" pitchFamily="34" charset="-120"/>
-            </a:endParaRPr>
-          </a:p>
-          <a:p>
-            <a:pPr marL="0" indent="0" algn="ctr">
-              <a:buNone/>
-            </a:pPr>
-            <a:r>
-              <a:rPr lang="zh-CN" altLang="en-US" sz="4800" b="1" dirty="0">
-                <a:latin typeface="Microsoft JhengHei" pitchFamily="34" charset="-120"/>
-                <a:ea typeface="Microsoft JhengHei" pitchFamily="34" charset="-120"/>
-              </a:rPr>
-              <a:t>藉我賜恩</a:t>
-            </a:r>
-            <a:r>
-              <a:rPr lang="zh-CN" altLang="en-US" sz="4800" b="1" dirty="0">
-                <a:latin typeface="Microsoft JhengHei" pitchFamily="34" charset="-120"/>
-                <a:ea typeface="Microsoft JhengHei" pitchFamily="34" charset="-120"/>
-              </a:rPr>
-              <a:t>福  使</a:t>
-            </a:r>
-            <a:r>
-              <a:rPr lang="zh-CN" altLang="en-US" sz="4800" b="1" dirty="0">
-                <a:latin typeface="Microsoft JhengHei" pitchFamily="34" charset="-120"/>
-                <a:ea typeface="Microsoft JhengHei" pitchFamily="34" charset="-120"/>
-              </a:rPr>
-              <a:t>他人得救</a:t>
-            </a:r>
-            <a:endParaRPr lang="en-US" sz="4800" b="1" dirty="0">
-              <a:latin typeface="Microsoft JhengHei" pitchFamily="34" charset="-120"/>
-              <a:ea typeface="Microsoft JhengHei" pitchFamily="34" charset="-120"/>
-            </a:endParaRPr>
+              <a:t>藉我生命  榮耀主名</a:t>
+            </a:r>
           </a:p>
         </p:txBody>
       </p:sp>
     </p:spTree>
     <p:extLst>
       <p:ext uri="{BB962C8B-B14F-4D97-AF65-F5344CB8AC3E}">
-        <p14:creationId xmlns:p14="http://schemas.microsoft.com/office/powerpoint/2010/main" val="3849895065"/>
+        <p14:creationId xmlns:p14="http://schemas.microsoft.com/office/powerpoint/2010/main" val="570026851"/>
       </p:ext>
     </p:extLst>
   </p:cSld>
@@ -3891,7 +3959,13 @@
   <p:cSld>
     <p:spTree>
       <p:nvGrpSpPr>
-        <p:cNvPr id="1" name=""/>
+        <p:cNvPr id="1" name="">
+          <a:extLst>
+            <a:ext uri="{FF2B5EF4-FFF2-40B4-BE49-F238E27FC236}">
+              <a16:creationId xmlns:a16="http://schemas.microsoft.com/office/drawing/2014/main" id="{03E5E197-CA1F-AD20-82A4-9B024225DC18}"/>
+            </a:ext>
+          </a:extLst>
+        </p:cNvPr>
         <p:cNvGrpSpPr/>
         <p:nvPr/>
       </p:nvGrpSpPr>
@@ -3905,178 +3979,67 @@
       </p:grpSpPr>
       <p:sp>
         <p:nvSpPr>
-          <p:cNvPr id="2" name="Title 1"/>
-          <p:cNvSpPr>
-            <a:spLocks noGrp="1"/>
-          </p:cNvSpPr>
-          <p:nvPr>
-            <p:ph type="title"/>
-          </p:nvPr>
-        </p:nvSpPr>
-        <p:spPr/>
-        <p:txBody>
-          <a:bodyPr>
+          <p:cNvPr id="5" name="內容版面配置區 4">
+            <a:extLst>
+              <a:ext uri="{FF2B5EF4-FFF2-40B4-BE49-F238E27FC236}">
+                <a16:creationId xmlns:a16="http://schemas.microsoft.com/office/drawing/2014/main" id="{8829E799-CC27-9DCF-BE77-60053D22DFE0}"/>
+              </a:ext>
+            </a:extLst>
+          </p:cNvPr>
+          <p:cNvSpPr>
+            <a:spLocks noGrp="1"/>
+          </p:cNvSpPr>
+          <p:nvPr>
+            <p:ph idx="1"/>
+          </p:nvPr>
+        </p:nvSpPr>
+        <p:spPr>
+          <a:xfrm>
+            <a:off x="0" y="1563639"/>
+            <a:ext cx="9144000" cy="1803647"/>
+          </a:xfrm>
+        </p:spPr>
+        <p:txBody>
+          <a:bodyPr anchor="ctr">
             <a:normAutofit/>
           </a:bodyPr>
           <a:lstStyle/>
           <a:p>
-            <a:r>
-              <a:rPr lang="zh-CN" altLang="en-US" sz="4000" b="1" dirty="0">
+            <a:pPr marL="0" indent="0" algn="ctr">
+              <a:buNone/>
+            </a:pPr>
+            <a:r>
+              <a:rPr lang="zh-TW" altLang="en-US" sz="4800" b="1" dirty="0">
+                <a:solidFill>
+                  <a:srgbClr val="660033"/>
+                </a:solidFill>
                 <a:latin typeface="Microsoft JhengHei" pitchFamily="34" charset="-120"/>
                 <a:ea typeface="Microsoft JhengHei" pitchFamily="34" charset="-120"/>
               </a:rPr>
-              <a:t>藉我賜恩福</a:t>
-            </a:r>
-            <a:endParaRPr lang="en-US" sz="4000" dirty="0">
-              <a:latin typeface="Microsoft JhengHei" pitchFamily="34" charset="-120"/>
-              <a:ea typeface="Microsoft JhengHei" pitchFamily="34" charset="-120"/>
-            </a:endParaRPr>
-          </a:p>
-        </p:txBody>
-      </p:sp>
-      <p:sp>
-        <p:nvSpPr>
-          <p:cNvPr id="3" name="Content Placeholder 2"/>
-          <p:cNvSpPr>
-            <a:spLocks noGrp="1"/>
-          </p:cNvSpPr>
-          <p:nvPr>
-            <p:ph idx="1"/>
-          </p:nvPr>
-        </p:nvSpPr>
-        <p:spPr/>
-        <p:txBody>
-          <a:bodyPr>
-            <a:noAutofit/>
-          </a:bodyPr>
-          <a:lstStyle/>
+              <a:t>藉我賜恩福  救主聽我求</a:t>
+            </a:r>
+          </a:p>
           <a:p>
             <a:pPr marL="0" indent="0" algn="ctr">
               <a:buNone/>
             </a:pPr>
             <a:r>
-              <a:rPr lang="zh-CN" altLang="en-US" sz="4800" b="1" dirty="0">
+              <a:rPr lang="zh-TW" altLang="en-US" sz="4800" b="1" dirty="0">
+                <a:solidFill>
+                  <a:srgbClr val="660033"/>
+                </a:solidFill>
                 <a:latin typeface="Microsoft JhengHei" pitchFamily="34" charset="-120"/>
                 <a:ea typeface="Microsoft JhengHei" pitchFamily="34" charset="-120"/>
               </a:rPr>
-              <a:t>白白得來故要白白施</a:t>
-            </a:r>
-            <a:r>
-              <a:rPr lang="zh-CN" altLang="en-US" sz="4800" b="1" dirty="0">
-                <a:latin typeface="Microsoft JhengHei" pitchFamily="34" charset="-120"/>
-                <a:ea typeface="Microsoft JhengHei" pitchFamily="34" charset="-120"/>
-              </a:rPr>
-              <a:t>與</a:t>
-            </a:r>
-            <a:endParaRPr lang="en-US" sz="4800" b="1" dirty="0">
-              <a:latin typeface="Microsoft JhengHei" pitchFamily="34" charset="-120"/>
-              <a:ea typeface="Microsoft JhengHei" pitchFamily="34" charset="-120"/>
-            </a:endParaRPr>
-          </a:p>
-          <a:p>
-            <a:pPr marL="0" indent="0" algn="ctr">
-              <a:buNone/>
-            </a:pPr>
-            <a:r>
-              <a:rPr lang="zh-CN" altLang="en-US" sz="4800" b="1" dirty="0">
-                <a:latin typeface="Microsoft JhengHei" pitchFamily="34" charset="-120"/>
-                <a:ea typeface="Microsoft JhengHei" pitchFamily="34" charset="-120"/>
-              </a:rPr>
-              <a:t>愛人要像主愛</a:t>
-            </a:r>
-            <a:r>
-              <a:rPr lang="zh-CN" altLang="en-US" sz="4800" b="1" dirty="0">
-                <a:latin typeface="Microsoft JhengHei" pitchFamily="34" charset="-120"/>
-                <a:ea typeface="Microsoft JhengHei" pitchFamily="34" charset="-120"/>
-              </a:rPr>
-              <a:t>你</a:t>
-            </a:r>
-            <a:endParaRPr lang="en-US" sz="4800" b="1" dirty="0">
-              <a:latin typeface="Microsoft JhengHei" pitchFamily="34" charset="-120"/>
-              <a:ea typeface="Microsoft JhengHei" pitchFamily="34" charset="-120"/>
-            </a:endParaRPr>
-          </a:p>
-          <a:p>
-            <a:pPr marL="0" indent="0" algn="ctr">
-              <a:buNone/>
-            </a:pPr>
-            <a:r>
-              <a:rPr lang="zh-CN" altLang="en-US" sz="4800" b="1" dirty="0">
-                <a:latin typeface="Microsoft JhengHei" pitchFamily="34" charset="-120"/>
-                <a:ea typeface="Microsoft JhengHei" pitchFamily="34" charset="-120"/>
-              </a:rPr>
-              <a:t>攙扶軟弱者務要盡心</a:t>
-            </a:r>
-            <a:r>
-              <a:rPr lang="zh-CN" altLang="en-US" sz="4800" b="1" dirty="0">
-                <a:latin typeface="Microsoft JhengHei" pitchFamily="34" charset="-120"/>
-                <a:ea typeface="Microsoft JhengHei" pitchFamily="34" charset="-120"/>
-              </a:rPr>
-              <a:t>力</a:t>
-            </a:r>
-            <a:endParaRPr lang="en-US" sz="4800" b="1" dirty="0">
-              <a:latin typeface="Microsoft JhengHei" pitchFamily="34" charset="-120"/>
-              <a:ea typeface="Microsoft JhengHei" pitchFamily="34" charset="-120"/>
-            </a:endParaRPr>
-          </a:p>
-          <a:p>
-            <a:pPr marL="0" indent="0" algn="ctr">
-              <a:buNone/>
-            </a:pPr>
-            <a:r>
-              <a:rPr lang="zh-CN" altLang="en-US" sz="4800" b="1" dirty="0">
-                <a:latin typeface="Microsoft JhengHei" pitchFamily="34" charset="-120"/>
-                <a:ea typeface="Microsoft JhengHei" pitchFamily="34" charset="-120"/>
-              </a:rPr>
-              <a:t>忠於神始終如一</a:t>
-            </a:r>
-            <a:endParaRPr lang="en-US" sz="4800" b="1" dirty="0">
-              <a:latin typeface="Microsoft JhengHei" pitchFamily="34" charset="-120"/>
-              <a:ea typeface="Microsoft JhengHei" pitchFamily="34" charset="-120"/>
-            </a:endParaRPr>
-          </a:p>
-        </p:txBody>
-      </p:sp>
-      <p:sp>
-        <p:nvSpPr>
-          <p:cNvPr id="4" name="TextBox 3"/>
-          <p:cNvSpPr txBox="1"/>
-          <p:nvPr/>
-        </p:nvSpPr>
-        <p:spPr>
-          <a:xfrm>
-            <a:off x="609600" y="1230924"/>
-            <a:ext cx="914400" cy="769441"/>
-          </a:xfrm>
-          <a:prstGeom prst="rect">
-            <a:avLst/>
-          </a:prstGeom>
-          <a:noFill/>
-        </p:spPr>
-        <p:txBody>
-          <a:bodyPr wrap="square" rtlCol="0">
-            <a:spAutoFit/>
-          </a:bodyPr>
-          <a:lstStyle/>
-          <a:p>
-            <a:r>
-              <a:rPr lang="en-US" sz="4400" b="1" dirty="0" smtClean="0">
-                <a:latin typeface="Microsoft JhengHei" pitchFamily="34" charset="-120"/>
-                <a:ea typeface="Microsoft JhengHei" pitchFamily="34" charset="-120"/>
-              </a:rPr>
-              <a:t>3.</a:t>
-            </a:r>
-            <a:endParaRPr lang="en-US" sz="4400" b="1" dirty="0">
-              <a:latin typeface="Microsoft JhengHei" pitchFamily="34" charset="-120"/>
-              <a:ea typeface="Microsoft JhengHei" pitchFamily="34" charset="-120"/>
-            </a:endParaRPr>
+              <a:t>藉我賜恩福  使他人得救</a:t>
+            </a:r>
           </a:p>
         </p:txBody>
       </p:sp>
     </p:spTree>
     <p:extLst>
       <p:ext uri="{BB962C8B-B14F-4D97-AF65-F5344CB8AC3E}">
-        <p14:creationId xmlns:p14="http://schemas.microsoft.com/office/powerpoint/2010/main" val="3919053962"/>
+        <p14:creationId xmlns:p14="http://schemas.microsoft.com/office/powerpoint/2010/main" val="2156055407"/>
       </p:ext>
     </p:extLst>
   </p:cSld>
@@ -4091,7 +4054,13 @@
   <p:cSld>
     <p:spTree>
       <p:nvGrpSpPr>
-        <p:cNvPr id="1" name=""/>
+        <p:cNvPr id="1" name="">
+          <a:extLst>
+            <a:ext uri="{FF2B5EF4-FFF2-40B4-BE49-F238E27FC236}">
+              <a16:creationId xmlns:a16="http://schemas.microsoft.com/office/drawing/2014/main" id="{98FDEA6B-95AA-39A1-A797-62CCFCC9ECD3}"/>
+            </a:ext>
+          </a:extLst>
+        </p:cNvPr>
         <p:cNvGrpSpPr/>
         <p:nvPr/>
       </p:nvGrpSpPr>
@@ -4105,198 +4074,442 @@
       </p:grpSpPr>
       <p:sp>
         <p:nvSpPr>
-          <p:cNvPr id="2" name="Title 1"/>
-          <p:cNvSpPr>
-            <a:spLocks noGrp="1"/>
-          </p:cNvSpPr>
-          <p:nvPr>
-            <p:ph type="title"/>
-          </p:nvPr>
-        </p:nvSpPr>
-        <p:spPr/>
-        <p:txBody>
-          <a:bodyPr>
+          <p:cNvPr id="5" name="內容版面配置區 4">
+            <a:extLst>
+              <a:ext uri="{FF2B5EF4-FFF2-40B4-BE49-F238E27FC236}">
+                <a16:creationId xmlns:a16="http://schemas.microsoft.com/office/drawing/2014/main" id="{C69D530D-9D2C-83B8-689B-EF7A55801912}"/>
+              </a:ext>
+            </a:extLst>
+          </p:cNvPr>
+          <p:cNvSpPr>
+            <a:spLocks noGrp="1"/>
+          </p:cNvSpPr>
+          <p:nvPr>
+            <p:ph idx="1"/>
+          </p:nvPr>
+        </p:nvSpPr>
+        <p:spPr>
+          <a:xfrm>
+            <a:off x="0" y="1563639"/>
+            <a:ext cx="9144000" cy="1803647"/>
+          </a:xfrm>
+        </p:spPr>
+        <p:txBody>
+          <a:bodyPr anchor="ctr">
             <a:normAutofit/>
           </a:bodyPr>
           <a:lstStyle/>
           <a:p>
-            <a:r>
-              <a:rPr lang="zh-CN" altLang="en-US" sz="4000" b="1" dirty="0">
+            <a:pPr marL="0" indent="0" algn="ctr">
+              <a:buNone/>
+            </a:pPr>
+            <a:r>
+              <a:rPr lang="zh-TW" altLang="en-US" sz="4800" b="1" dirty="0">
+                <a:solidFill>
+                  <a:srgbClr val="660033"/>
+                </a:solidFill>
                 <a:latin typeface="Microsoft JhengHei" pitchFamily="34" charset="-120"/>
                 <a:ea typeface="Microsoft JhengHei" pitchFamily="34" charset="-120"/>
               </a:rPr>
-              <a:t>藉我賜恩福</a:t>
-            </a:r>
-            <a:endParaRPr lang="en-US" sz="4000" dirty="0">
-              <a:latin typeface="Microsoft JhengHei" pitchFamily="34" charset="-120"/>
-              <a:ea typeface="Microsoft JhengHei" pitchFamily="34" charset="-120"/>
-            </a:endParaRPr>
-          </a:p>
-        </p:txBody>
-      </p:sp>
-      <p:sp>
-        <p:nvSpPr>
-          <p:cNvPr id="3" name="Content Placeholder 2"/>
-          <p:cNvSpPr>
-            <a:spLocks noGrp="1"/>
-          </p:cNvSpPr>
-          <p:nvPr>
-            <p:ph idx="1"/>
-          </p:nvPr>
-        </p:nvSpPr>
-        <p:spPr/>
-        <p:txBody>
-          <a:bodyPr>
-            <a:noAutofit/>
-          </a:bodyPr>
-          <a:lstStyle/>
+              <a:t>述說耶穌基督慈愛故事</a:t>
+            </a:r>
+          </a:p>
           <a:p>
             <a:pPr marL="0" indent="0" algn="ctr">
               <a:buNone/>
             </a:pPr>
             <a:r>
-              <a:rPr lang="zh-CN" altLang="en-US" sz="4800" b="1" dirty="0">
+              <a:rPr lang="zh-TW" altLang="en-US" sz="4800" b="1" dirty="0">
+                <a:solidFill>
+                  <a:srgbClr val="660033"/>
+                </a:solidFill>
                 <a:latin typeface="Microsoft JhengHei" pitchFamily="34" charset="-120"/>
                 <a:ea typeface="Microsoft JhengHei" pitchFamily="34" charset="-120"/>
               </a:rPr>
-              <a:t>藉我賜恩</a:t>
-            </a:r>
-            <a:r>
-              <a:rPr lang="zh-CN" altLang="en-US" sz="4800" b="1" dirty="0">
+              <a:t>述說祂赦罪大能</a:t>
+            </a:r>
+          </a:p>
+        </p:txBody>
+      </p:sp>
+      <p:sp>
+        <p:nvSpPr>
+          <p:cNvPr id="3" name="TextBox 2">
+            <a:extLst>
+              <a:ext uri="{FF2B5EF4-FFF2-40B4-BE49-F238E27FC236}">
+                <a16:creationId xmlns:a16="http://schemas.microsoft.com/office/drawing/2014/main" id="{E7E919C5-DAB7-91C9-783A-65A98D8B58AA}"/>
+              </a:ext>
+            </a:extLst>
+          </p:cNvPr>
+          <p:cNvSpPr txBox="1"/>
+          <p:nvPr/>
+        </p:nvSpPr>
+        <p:spPr>
+          <a:xfrm>
+            <a:off x="0" y="3795887"/>
+            <a:ext cx="9144000" cy="461665"/>
+          </a:xfrm>
+          <a:prstGeom prst="rect">
+            <a:avLst/>
+          </a:prstGeom>
+          <a:noFill/>
+        </p:spPr>
+        <p:txBody>
+          <a:bodyPr wrap="square" rtlCol="0">
+            <a:spAutoFit/>
+          </a:bodyPr>
+          <a:lstStyle/>
+          <a:p>
+            <a:pPr algn="ctr"/>
+            <a:r>
+              <a:rPr lang="en-US" sz="2400" b="1" dirty="0">
+                <a:solidFill>
+                  <a:srgbClr val="660033"/>
+                </a:solidFill>
+              </a:rPr>
+              <a:t>( 2 / 3 )</a:t>
+            </a:r>
+            <a:endParaRPr lang="vi-VN" sz="2400" b="1" dirty="0">
+              <a:solidFill>
+                <a:srgbClr val="660033"/>
+              </a:solidFill>
+            </a:endParaRPr>
+          </a:p>
+        </p:txBody>
+      </p:sp>
+    </p:spTree>
+    <p:extLst>
+      <p:ext uri="{BB962C8B-B14F-4D97-AF65-F5344CB8AC3E}">
+        <p14:creationId xmlns:p14="http://schemas.microsoft.com/office/powerpoint/2010/main" val="630810177"/>
+      </p:ext>
+    </p:extLst>
+  </p:cSld>
+  <p:clrMapOvr>
+    <a:masterClrMapping/>
+  </p:clrMapOvr>
+</p:sld>
+</file>
+
+<file path=ppt/slides/slide7.xml><?xml version="1.0" encoding="utf-8"?>
+<p:sld xmlns:a="http://schemas.openxmlformats.org/drawingml/2006/main" xmlns:r="http://schemas.openxmlformats.org/officeDocument/2006/relationships" xmlns:p="http://schemas.openxmlformats.org/presentationml/2006/main">
+  <p:cSld>
+    <p:spTree>
+      <p:nvGrpSpPr>
+        <p:cNvPr id="1" name="">
+          <a:extLst>
+            <a:ext uri="{FF2B5EF4-FFF2-40B4-BE49-F238E27FC236}">
+              <a16:creationId xmlns:a16="http://schemas.microsoft.com/office/drawing/2014/main" id="{9D40CCEC-CF20-5239-7BE2-FB51B11C8BDE}"/>
+            </a:ext>
+          </a:extLst>
+        </p:cNvPr>
+        <p:cNvGrpSpPr/>
+        <p:nvPr/>
+      </p:nvGrpSpPr>
+      <p:grpSpPr>
+        <a:xfrm>
+          <a:off x="0" y="0"/>
+          <a:ext cx="0" cy="0"/>
+          <a:chOff x="0" y="0"/>
+          <a:chExt cx="0" cy="0"/>
+        </a:xfrm>
+      </p:grpSpPr>
+      <p:sp>
+        <p:nvSpPr>
+          <p:cNvPr id="5" name="內容版面配置區 4">
+            <a:extLst>
+              <a:ext uri="{FF2B5EF4-FFF2-40B4-BE49-F238E27FC236}">
+                <a16:creationId xmlns:a16="http://schemas.microsoft.com/office/drawing/2014/main" id="{A7D38E9A-4393-64B6-8976-8C77388369B8}"/>
+              </a:ext>
+            </a:extLst>
+          </p:cNvPr>
+          <p:cNvSpPr>
+            <a:spLocks noGrp="1"/>
+          </p:cNvSpPr>
+          <p:nvPr>
+            <p:ph idx="1"/>
+          </p:nvPr>
+        </p:nvSpPr>
+        <p:spPr>
+          <a:xfrm>
+            <a:off x="0" y="1563639"/>
+            <a:ext cx="9144000" cy="1803647"/>
+          </a:xfrm>
+        </p:spPr>
+        <p:txBody>
+          <a:bodyPr anchor="ctr">
+            <a:normAutofit/>
+          </a:bodyPr>
+          <a:lstStyle/>
+          <a:p>
+            <a:pPr marL="0" indent="0" algn="ctr">
+              <a:buNone/>
+            </a:pPr>
+            <a:r>
+              <a:rPr lang="zh-TW" altLang="en-US" sz="4800" b="1" dirty="0">
+                <a:solidFill>
+                  <a:srgbClr val="660033"/>
+                </a:solidFill>
                 <a:latin typeface="Microsoft JhengHei" pitchFamily="34" charset="-120"/>
                 <a:ea typeface="Microsoft JhengHei" pitchFamily="34" charset="-120"/>
               </a:rPr>
-              <a:t>福  藉</a:t>
-            </a:r>
-            <a:r>
-              <a:rPr lang="zh-CN" altLang="en-US" sz="4800" b="1" dirty="0">
+              <a:t>別人信祂要藉祢去見證</a:t>
+            </a:r>
+          </a:p>
+          <a:p>
+            <a:pPr marL="0" indent="0" algn="ctr">
+              <a:buNone/>
+            </a:pPr>
+            <a:r>
+              <a:rPr lang="zh-TW" altLang="en-US" sz="4800" b="1" dirty="0">
+                <a:solidFill>
+                  <a:srgbClr val="660033"/>
+                </a:solidFill>
                 <a:latin typeface="Microsoft JhengHei" pitchFamily="34" charset="-120"/>
                 <a:ea typeface="Microsoft JhengHei" pitchFamily="34" charset="-120"/>
               </a:rPr>
-              <a:t>我賜恩</a:t>
-            </a:r>
-            <a:r>
-              <a:rPr lang="zh-CN" altLang="en-US" sz="4800" b="1" dirty="0">
+              <a:t>生活時刻像明燈</a:t>
+            </a:r>
+          </a:p>
+        </p:txBody>
+      </p:sp>
+      <p:sp>
+        <p:nvSpPr>
+          <p:cNvPr id="3" name="TextBox 2">
+            <a:extLst>
+              <a:ext uri="{FF2B5EF4-FFF2-40B4-BE49-F238E27FC236}">
+                <a16:creationId xmlns:a16="http://schemas.microsoft.com/office/drawing/2014/main" id="{58DD8929-0AE7-2C5A-4B33-ACD092500A94}"/>
+              </a:ext>
+            </a:extLst>
+          </p:cNvPr>
+          <p:cNvSpPr txBox="1"/>
+          <p:nvPr/>
+        </p:nvSpPr>
+        <p:spPr>
+          <a:xfrm>
+            <a:off x="0" y="3795887"/>
+            <a:ext cx="9144000" cy="461665"/>
+          </a:xfrm>
+          <a:prstGeom prst="rect">
+            <a:avLst/>
+          </a:prstGeom>
+          <a:noFill/>
+        </p:spPr>
+        <p:txBody>
+          <a:bodyPr wrap="square" rtlCol="0">
+            <a:spAutoFit/>
+          </a:bodyPr>
+          <a:lstStyle/>
+          <a:p>
+            <a:pPr algn="ctr"/>
+            <a:r>
+              <a:rPr lang="en-US" sz="2400" b="1" dirty="0">
+                <a:solidFill>
+                  <a:srgbClr val="660033"/>
+                </a:solidFill>
+              </a:rPr>
+              <a:t>( 2 / 3 )</a:t>
+            </a:r>
+            <a:endParaRPr lang="vi-VN" sz="2400" b="1" dirty="0">
+              <a:solidFill>
+                <a:srgbClr val="660033"/>
+              </a:solidFill>
+            </a:endParaRPr>
+          </a:p>
+        </p:txBody>
+      </p:sp>
+    </p:spTree>
+    <p:extLst>
+      <p:ext uri="{BB962C8B-B14F-4D97-AF65-F5344CB8AC3E}">
+        <p14:creationId xmlns:p14="http://schemas.microsoft.com/office/powerpoint/2010/main" val="4005720187"/>
+      </p:ext>
+    </p:extLst>
+  </p:cSld>
+  <p:clrMapOvr>
+    <a:masterClrMapping/>
+  </p:clrMapOvr>
+</p:sld>
+</file>
+
+<file path=ppt/slides/slide8.xml><?xml version="1.0" encoding="utf-8"?>
+<p:sld xmlns:a="http://schemas.openxmlformats.org/drawingml/2006/main" xmlns:r="http://schemas.openxmlformats.org/officeDocument/2006/relationships" xmlns:p="http://schemas.openxmlformats.org/presentationml/2006/main">
+  <p:cSld>
+    <p:spTree>
+      <p:nvGrpSpPr>
+        <p:cNvPr id="1" name="">
+          <a:extLst>
+            <a:ext uri="{FF2B5EF4-FFF2-40B4-BE49-F238E27FC236}">
+              <a16:creationId xmlns:a16="http://schemas.microsoft.com/office/drawing/2014/main" id="{340DE652-81D4-33B9-5099-F88A479AF260}"/>
+            </a:ext>
+          </a:extLst>
+        </p:cNvPr>
+        <p:cNvGrpSpPr/>
+        <p:nvPr/>
+      </p:nvGrpSpPr>
+      <p:grpSpPr>
+        <a:xfrm>
+          <a:off x="0" y="0"/>
+          <a:ext cx="0" cy="0"/>
+          <a:chOff x="0" y="0"/>
+          <a:chExt cx="0" cy="0"/>
+        </a:xfrm>
+      </p:grpSpPr>
+      <p:sp>
+        <p:nvSpPr>
+          <p:cNvPr id="5" name="內容版面配置區 4">
+            <a:extLst>
+              <a:ext uri="{FF2B5EF4-FFF2-40B4-BE49-F238E27FC236}">
+                <a16:creationId xmlns:a16="http://schemas.microsoft.com/office/drawing/2014/main" id="{B66D0315-6630-B67B-853B-D59F669087EE}"/>
+              </a:ext>
+            </a:extLst>
+          </p:cNvPr>
+          <p:cNvSpPr>
+            <a:spLocks noGrp="1"/>
+          </p:cNvSpPr>
+          <p:nvPr>
+            <p:ph idx="1"/>
+          </p:nvPr>
+        </p:nvSpPr>
+        <p:spPr>
+          <a:xfrm>
+            <a:off x="0" y="1563639"/>
+            <a:ext cx="9144000" cy="1803647"/>
+          </a:xfrm>
+        </p:spPr>
+        <p:txBody>
+          <a:bodyPr anchor="ctr">
+            <a:normAutofit/>
+          </a:bodyPr>
+          <a:lstStyle/>
+          <a:p>
+            <a:pPr marL="0" indent="0" algn="ctr">
+              <a:buNone/>
+            </a:pPr>
+            <a:r>
+              <a:rPr lang="zh-TW" altLang="en-US" sz="4800" b="1" dirty="0">
+                <a:solidFill>
+                  <a:srgbClr val="660033"/>
+                </a:solidFill>
                 <a:latin typeface="Microsoft JhengHei" pitchFamily="34" charset="-120"/>
                 <a:ea typeface="Microsoft JhengHei" pitchFamily="34" charset="-120"/>
               </a:rPr>
-              <a:t>福</a:t>
-            </a:r>
-            <a:endParaRPr lang="en-US" sz="4800" b="1" dirty="0">
-              <a:latin typeface="Microsoft JhengHei" pitchFamily="34" charset="-120"/>
-              <a:ea typeface="Microsoft JhengHei" pitchFamily="34" charset="-120"/>
-            </a:endParaRPr>
+              <a:t>藉我賜恩福  藉我賜恩福</a:t>
+            </a:r>
           </a:p>
           <a:p>
             <a:pPr marL="0" indent="0" algn="ctr">
               <a:buNone/>
             </a:pPr>
             <a:r>
-              <a:rPr lang="zh-CN" altLang="en-US" sz="4800" b="1" dirty="0">
+              <a:rPr lang="zh-TW" altLang="en-US" sz="4800" b="1" dirty="0">
+                <a:solidFill>
+                  <a:srgbClr val="660033"/>
+                </a:solidFill>
                 <a:latin typeface="Microsoft JhengHei" pitchFamily="34" charset="-120"/>
                 <a:ea typeface="Microsoft JhengHei" pitchFamily="34" charset="-120"/>
               </a:rPr>
-              <a:t>藉我生</a:t>
-            </a:r>
-            <a:r>
-              <a:rPr lang="zh-CN" altLang="en-US" sz="4800" b="1" dirty="0">
+              <a:t>藉我生命  榮耀主名</a:t>
+            </a:r>
+          </a:p>
+        </p:txBody>
+      </p:sp>
+    </p:spTree>
+    <p:extLst>
+      <p:ext uri="{BB962C8B-B14F-4D97-AF65-F5344CB8AC3E}">
+        <p14:creationId xmlns:p14="http://schemas.microsoft.com/office/powerpoint/2010/main" val="1835407264"/>
+      </p:ext>
+    </p:extLst>
+  </p:cSld>
+  <p:clrMapOvr>
+    <a:masterClrMapping/>
+  </p:clrMapOvr>
+</p:sld>
+</file>
+
+<file path=ppt/slides/slide9.xml><?xml version="1.0" encoding="utf-8"?>
+<p:sld xmlns:a="http://schemas.openxmlformats.org/drawingml/2006/main" xmlns:r="http://schemas.openxmlformats.org/officeDocument/2006/relationships" xmlns:p="http://schemas.openxmlformats.org/presentationml/2006/main">
+  <p:cSld>
+    <p:spTree>
+      <p:nvGrpSpPr>
+        <p:cNvPr id="1" name="">
+          <a:extLst>
+            <a:ext uri="{FF2B5EF4-FFF2-40B4-BE49-F238E27FC236}">
+              <a16:creationId xmlns:a16="http://schemas.microsoft.com/office/drawing/2014/main" id="{C0B9F778-BC48-8B03-7F0E-CFE25D9A8E24}"/>
+            </a:ext>
+          </a:extLst>
+        </p:cNvPr>
+        <p:cNvGrpSpPr/>
+        <p:nvPr/>
+      </p:nvGrpSpPr>
+      <p:grpSpPr>
+        <a:xfrm>
+          <a:off x="0" y="0"/>
+          <a:ext cx="0" cy="0"/>
+          <a:chOff x="0" y="0"/>
+          <a:chExt cx="0" cy="0"/>
+        </a:xfrm>
+      </p:grpSpPr>
+      <p:sp>
+        <p:nvSpPr>
+          <p:cNvPr id="5" name="內容版面配置區 4">
+            <a:extLst>
+              <a:ext uri="{FF2B5EF4-FFF2-40B4-BE49-F238E27FC236}">
+                <a16:creationId xmlns:a16="http://schemas.microsoft.com/office/drawing/2014/main" id="{5287D16C-D927-94EF-A18A-04695D883503}"/>
+              </a:ext>
+            </a:extLst>
+          </p:cNvPr>
+          <p:cNvSpPr>
+            <a:spLocks noGrp="1"/>
+          </p:cNvSpPr>
+          <p:nvPr>
+            <p:ph idx="1"/>
+          </p:nvPr>
+        </p:nvSpPr>
+        <p:spPr>
+          <a:xfrm>
+            <a:off x="0" y="1563639"/>
+            <a:ext cx="9144000" cy="1803647"/>
+          </a:xfrm>
+        </p:spPr>
+        <p:txBody>
+          <a:bodyPr anchor="ctr">
+            <a:normAutofit/>
+          </a:bodyPr>
+          <a:lstStyle/>
+          <a:p>
+            <a:pPr marL="0" indent="0" algn="ctr">
+              <a:buNone/>
+            </a:pPr>
+            <a:r>
+              <a:rPr lang="zh-TW" altLang="en-US" sz="4800" b="1" dirty="0">
+                <a:solidFill>
+                  <a:srgbClr val="660033"/>
+                </a:solidFill>
                 <a:latin typeface="Microsoft JhengHei" pitchFamily="34" charset="-120"/>
                 <a:ea typeface="Microsoft JhengHei" pitchFamily="34" charset="-120"/>
               </a:rPr>
-              <a:t>命  榮</a:t>
-            </a:r>
-            <a:r>
-              <a:rPr lang="zh-CN" altLang="en-US" sz="4800" b="1" dirty="0">
+              <a:t>藉我賜恩福  救主聽我求</a:t>
+            </a:r>
+          </a:p>
+          <a:p>
+            <a:pPr marL="0" indent="0" algn="ctr">
+              <a:buNone/>
+            </a:pPr>
+            <a:r>
+              <a:rPr lang="zh-TW" altLang="en-US" sz="4800" b="1" dirty="0">
+                <a:solidFill>
+                  <a:srgbClr val="660033"/>
+                </a:solidFill>
                 <a:latin typeface="Microsoft JhengHei" pitchFamily="34" charset="-120"/>
                 <a:ea typeface="Microsoft JhengHei" pitchFamily="34" charset="-120"/>
               </a:rPr>
-              <a:t>耀主</a:t>
-            </a:r>
-            <a:r>
-              <a:rPr lang="zh-CN" altLang="en-US" sz="4800" b="1" dirty="0">
-                <a:latin typeface="Microsoft JhengHei" pitchFamily="34" charset="-120"/>
-                <a:ea typeface="Microsoft JhengHei" pitchFamily="34" charset="-120"/>
-              </a:rPr>
-              <a:t>名</a:t>
-            </a:r>
-            <a:endParaRPr lang="en-US" sz="4800" b="1" dirty="0">
-              <a:latin typeface="Microsoft JhengHei" pitchFamily="34" charset="-120"/>
-              <a:ea typeface="Microsoft JhengHei" pitchFamily="34" charset="-120"/>
-            </a:endParaRPr>
-          </a:p>
-          <a:p>
-            <a:pPr marL="0" indent="0" algn="ctr">
-              <a:buNone/>
-            </a:pPr>
-            <a:r>
-              <a:rPr lang="zh-CN" altLang="en-US" sz="4800" b="1" dirty="0">
-                <a:latin typeface="Microsoft JhengHei" pitchFamily="34" charset="-120"/>
-                <a:ea typeface="Microsoft JhengHei" pitchFamily="34" charset="-120"/>
-              </a:rPr>
-              <a:t>藉我賜恩</a:t>
-            </a:r>
-            <a:r>
-              <a:rPr lang="zh-CN" altLang="en-US" sz="4800" b="1" dirty="0">
-                <a:latin typeface="Microsoft JhengHei" pitchFamily="34" charset="-120"/>
-                <a:ea typeface="Microsoft JhengHei" pitchFamily="34" charset="-120"/>
-              </a:rPr>
-              <a:t>福  救主  聽</a:t>
-            </a:r>
-            <a:r>
-              <a:rPr lang="zh-CN" altLang="en-US" sz="4800" b="1" dirty="0">
-                <a:latin typeface="Microsoft JhengHei" pitchFamily="34" charset="-120"/>
-                <a:ea typeface="Microsoft JhengHei" pitchFamily="34" charset="-120"/>
-              </a:rPr>
-              <a:t>我</a:t>
-            </a:r>
-            <a:r>
-              <a:rPr lang="zh-CN" altLang="en-US" sz="4800" b="1" dirty="0">
-                <a:latin typeface="Microsoft JhengHei" pitchFamily="34" charset="-120"/>
-                <a:ea typeface="Microsoft JhengHei" pitchFamily="34" charset="-120"/>
-              </a:rPr>
-              <a:t>求</a:t>
-            </a:r>
-            <a:endParaRPr lang="en-US" sz="4800" b="1" dirty="0">
-              <a:latin typeface="Microsoft JhengHei" pitchFamily="34" charset="-120"/>
-              <a:ea typeface="Microsoft JhengHei" pitchFamily="34" charset="-120"/>
-            </a:endParaRPr>
-          </a:p>
-          <a:p>
-            <a:pPr marL="0" indent="0" algn="ctr">
-              <a:buNone/>
-            </a:pPr>
-            <a:r>
-              <a:rPr lang="zh-CN" altLang="en-US" sz="4800" b="1" dirty="0">
-                <a:latin typeface="Microsoft JhengHei" pitchFamily="34" charset="-120"/>
-                <a:ea typeface="Microsoft JhengHei" pitchFamily="34" charset="-120"/>
-              </a:rPr>
-              <a:t>藉我賜恩</a:t>
-            </a:r>
-            <a:r>
-              <a:rPr lang="zh-CN" altLang="en-US" sz="4800" b="1" dirty="0">
-                <a:latin typeface="Microsoft JhengHei" pitchFamily="34" charset="-120"/>
-                <a:ea typeface="Microsoft JhengHei" pitchFamily="34" charset="-120"/>
-              </a:rPr>
-              <a:t>福  使</a:t>
-            </a:r>
-            <a:r>
-              <a:rPr lang="zh-CN" altLang="en-US" sz="4800" b="1" dirty="0">
-                <a:latin typeface="Microsoft JhengHei" pitchFamily="34" charset="-120"/>
-                <a:ea typeface="Microsoft JhengHei" pitchFamily="34" charset="-120"/>
-              </a:rPr>
-              <a:t>他人得救</a:t>
-            </a:r>
-            <a:endParaRPr lang="en-US" sz="4800" b="1" dirty="0">
-              <a:latin typeface="Microsoft JhengHei" pitchFamily="34" charset="-120"/>
-              <a:ea typeface="Microsoft JhengHei" pitchFamily="34" charset="-120"/>
-            </a:endParaRPr>
+              <a:t>藉我賜恩福  使他人得救</a:t>
+            </a:r>
           </a:p>
         </p:txBody>
       </p:sp>
     </p:spTree>
     <p:extLst>
       <p:ext uri="{BB962C8B-B14F-4D97-AF65-F5344CB8AC3E}">
-        <p14:creationId xmlns:p14="http://schemas.microsoft.com/office/powerpoint/2010/main" val="2156505708"/>
+        <p14:creationId xmlns:p14="http://schemas.microsoft.com/office/powerpoint/2010/main" val="1197003088"/>
       </p:ext>
     </p:extLst>
   </p:cSld>
